--- a/NAWI-ReportPro-SIH2026-Submission.pptx
+++ b/NAWI-ReportPro-SIH2026-Submission.pptx
@@ -5803,7 +5803,7 @@
         <p:spPr>
           <a:xfrm>
             <a:off x="500000" y="2000000"/>
-            <a:ext cx="5800000" cy="4500000"/>
+            <a:ext cx="5800000" cy="3800000"/>
           </a:xfrm>
           <a:prstGeom prst="rect">
             <a:avLst/>
@@ -5818,12 +5818,12 @@
           <a:p>
             <a:pPr>
               <a:spcAft>
-                <a:spcPts val="1200"/>
+                <a:spcPts val="1000"/>
               </a:spcAft>
               <a:buNone/>
             </a:pPr>
             <a:r>
-              <a:rPr b="1" sz="1600">
+              <a:rPr b="1" sz="1500">
                 <a:solidFill>
                   <a:srgbClr val="1E3A5F"/>
                 </a:solidFill>
@@ -5831,7 +5831,7 @@
               <a:t>Problem Statement ID: </a:t>
             </a:r>
             <a:r>
-              <a:rPr b="1" sz="1600">
+              <a:rPr b="1" sz="1500">
                 <a:solidFill>
                   <a:srgbClr val="D97706"/>
                 </a:solidFill>
@@ -5843,12 +5843,12 @@
           <a:p>
             <a:pPr>
               <a:spcAft>
-                <a:spcPts val="1200"/>
+                <a:spcPts val="1000"/>
               </a:spcAft>
               <a:buNone/>
             </a:pPr>
             <a:r>
-              <a:rPr b="1" sz="1600">
+              <a:rPr b="1" sz="1500">
                 <a:solidFill>
                   <a:srgbClr val="1E3A5F"/>
                 </a:solidFill>
@@ -5857,23 +5857,24 @@
 </a:t>
             </a:r>
             <a:r>
-              <a:rPr b="0" sz="1600">
+              <a:rPr b="0" sz="1500">
                 <a:solidFill>
                   <a:srgbClr val="0F172A"/>
                 </a:solidFill>
               </a:rPr>
-              <a:t>Automated Test Report Generator for Non-Automatic Weighing Instruments (NAWI)</a:t>
+              <a:t>Automated Test Report Generator for
+Non-Automatic Weighing Instruments (NAWI)</a:t>
             </a:r>
           </a:p>
           <a:p>
             <a:pPr>
               <a:spcAft>
-                <a:spcPts val="1200"/>
+                <a:spcPts val="1000"/>
               </a:spcAft>
               <a:buNone/>
             </a:pPr>
             <a:r>
-              <a:rPr b="1" sz="1600">
+              <a:rPr b="1" sz="1500">
                 <a:solidFill>
                   <a:srgbClr val="1E3A5F"/>
                 </a:solidFill>
@@ -5881,7 +5882,7 @@
               <a:t>Theme: </a:t>
             </a:r>
             <a:r>
-              <a:rPr b="0" sz="1600">
+              <a:rPr b="0" sz="1500">
                 <a:solidFill>
                   <a:srgbClr val="0F172A"/>
                 </a:solidFill>
@@ -5892,12 +5893,12 @@
           <a:p>
             <a:pPr>
               <a:spcAft>
-                <a:spcPts val="1200"/>
+                <a:spcPts val="1000"/>
               </a:spcAft>
               <a:buNone/>
             </a:pPr>
             <a:r>
-              <a:rPr b="1" sz="1600">
+              <a:rPr b="1" sz="1500">
                 <a:solidFill>
                   <a:srgbClr val="1E3A5F"/>
                 </a:solidFill>
@@ -5905,7 +5906,7 @@
               <a:t>PS Category: </a:t>
             </a:r>
             <a:r>
-              <a:rPr b="0" sz="1600">
+              <a:rPr b="0" sz="1500">
                 <a:solidFill>
                   <a:srgbClr val="0F172A"/>
                 </a:solidFill>
@@ -5916,12 +5917,12 @@
           <a:p>
             <a:pPr>
               <a:spcAft>
-                <a:spcPts val="1200"/>
+                <a:spcPts val="1000"/>
               </a:spcAft>
               <a:buNone/>
             </a:pPr>
             <a:r>
-              <a:rPr b="1" sz="1600">
+              <a:rPr b="1" sz="1500">
                 <a:solidFill>
                   <a:srgbClr val="1E3A5F"/>
                 </a:solidFill>
@@ -5929,7 +5930,7 @@
               <a:t>Team ID: </a:t>
             </a:r>
             <a:r>
-              <a:rPr b="0" sz="1600">
+              <a:rPr b="0" sz="1500">
                 <a:solidFill>
                   <a:srgbClr val="0F172A"/>
                 </a:solidFill>
@@ -5940,12 +5941,12 @@
           <a:p>
             <a:pPr>
               <a:spcAft>
-                <a:spcPts val="1200"/>
+                <a:spcPts val="1000"/>
               </a:spcAft>
               <a:buNone/>
             </a:pPr>
             <a:r>
-              <a:rPr b="1" sz="1600">
+              <a:rPr b="1" sz="1500">
                 <a:solidFill>
                   <a:srgbClr val="1E3A5F"/>
                 </a:solidFill>
@@ -5953,7 +5954,7 @@
               <a:t>Team Name: </a:t>
             </a:r>
             <a:r>
-              <a:rPr b="0" sz="1600">
+              <a:rPr b="0" sz="1500">
                 <a:solidFill>
                   <a:srgbClr val="0F172A"/>
                 </a:solidFill>
@@ -5993,6 +5994,78 @@
           </a:prstGeom>
         </p:spPr>
       </p:pic>
+      <p:sp>
+        <p:nvSpPr>
+          <p:cNvPr id="38" name="TextBox 37"/>
+          <p:cNvSpPr txBox="1"/>
+          <p:nvPr/>
+        </p:nvSpPr>
+        <p:spPr>
+          <a:xfrm>
+            <a:off x="500000" y="4700000"/>
+            <a:ext cx="5800000" cy="400000"/>
+          </a:xfrm>
+          <a:prstGeom prst="rect">
+            <a:avLst/>
+          </a:prstGeom>
+          <a:noFill/>
+        </p:spPr>
+        <p:txBody>
+          <a:bodyPr wrap="square">
+            <a:spAutoFit/>
+          </a:bodyPr>
+          <a:lstStyle/>
+          <a:p>
+            <a:pPr>
+              <a:buNone/>
+            </a:pPr>
+            <a:r>
+              <a:rPr sz="1200" b="0">
+                <a:solidFill>
+                  <a:srgbClr val="1E3A5F"/>
+                </a:solidFill>
+              </a:rPr>
+              <a:t>Institution: [Your College Name Here]  |  Mentor: [Faculty SPOC Name]</a:t>
+            </a:r>
+          </a:p>
+        </p:txBody>
+      </p:sp>
+      <p:sp>
+        <p:nvSpPr>
+          <p:cNvPr id="39" name="TextBox 38"/>
+          <p:cNvSpPr txBox="1"/>
+          <p:nvPr/>
+        </p:nvSpPr>
+        <p:spPr>
+          <a:xfrm>
+            <a:off x="500000" y="5400000"/>
+            <a:ext cx="8000000" cy="600000"/>
+          </a:xfrm>
+          <a:prstGeom prst="rect">
+            <a:avLst/>
+          </a:prstGeom>
+          <a:noFill/>
+        </p:spPr>
+        <p:txBody>
+          <a:bodyPr wrap="square">
+            <a:spAutoFit/>
+          </a:bodyPr>
+          <a:lstStyle/>
+          <a:p>
+            <a:pPr>
+              <a:buNone/>
+            </a:pPr>
+            <a:r>
+              <a:rPr sz="1250" i="1" b="0">
+                <a:solidFill>
+                  <a:srgbClr val="334155"/>
+                </a:solidFill>
+              </a:rPr>
+              <a:t>Automating India's Legal Metrology Verification across 1,656 Agricultural Mandis under OIML R-76</a:t>
+            </a:r>
+          </a:p>
+        </p:txBody>
+      </p:sp>
     </p:spTree>
   </p:cSld>
   <p:clrMapOvr>
@@ -6123,12 +6196,12 @@
               <a:t/>
             </a:r>
             <a:r>
-              <a:rPr sz="2400" b="1">
+              <a:rPr sz="2200" b="1">
                 <a:solidFill>
                   <a:srgbClr val="1E3A5F"/>
                 </a:solidFill>
               </a:rPr>
-              <a:t>NAWI-ReportPro: Automated Digital Metrology Platform</a:t>
+              <a:t>IDEA TITLE: NAWI-ReportPro — Automated Digital Metrology</a:t>
             </a:r>
           </a:p>
         </p:txBody>
@@ -6143,8 +6216,8 @@
         </p:nvSpPr>
         <p:spPr bwMode="auto">
           <a:xfrm>
-            <a:off x="400000" y="1300000"/>
-            <a:ext cx="5900000" cy="4900000"/>
+            <a:off x="400000" y="1200000"/>
+            <a:ext cx="5600000" cy="3400000"/>
           </a:xfrm>
           <a:prstGeom prst="rect">
             <a:avLst/>
@@ -6387,6 +6460,12 @@
           <a:prstGeom prst="ellipse">
             <a:avLst/>
           </a:prstGeom>
+          <a:solidFill>
+            <a:srgbClr val="1E3A5F"/>
+          </a:solidFill>
+          <a:ln>
+            <a:noFill/>
+          </a:ln>
         </p:spPr>
         <p:style>
           <a:lnRef idx="2">
@@ -6403,7 +6482,7 @@
           </a:fontRef>
         </p:style>
         <p:txBody>
-          <a:bodyPr rtlCol="0" anchor="ctr"/>
+          <a:bodyPr rtlCol="0" anchor="ctr" wrap="square"/>
           <a:lstStyle/>
           <a:p>
             <a:pPr algn="ctr">
@@ -6416,7 +6495,7 @@
             <a:r>
               <a:rPr sz="1000" b="1">
                 <a:solidFill>
-                  <a:srgbClr val="1E3A5F"/>
+                  <a:srgbClr val="FFFFFF"/>
                 </a:solidFill>
               </a:rPr>
               <a:t>Metrology
@@ -6456,30 +6535,367 @@
           </a:prstGeom>
         </p:spPr>
       </p:pic>
-      <p:pic>
-        <p:nvPicPr>
-          <p:cNvPr id="15363" name="Picture 15362" descr="solution_overview_1788429555304.jpg"/>
-          <p:cNvPicPr>
-            <a:picLocks noChangeAspect="1"/>
-          </p:cNvPicPr>
+      <p:sp>
+        <p:nvSpPr>
+          <p:cNvPr id="15363" name="Rounded Rectangle 15362"/>
+          <p:cNvSpPr/>
           <p:nvPr/>
-        </p:nvPicPr>
-        <p:blipFill>
-          <a:blip r:embed="rId4"/>
-          <a:stretch>
-            <a:fillRect/>
-          </a:stretch>
-        </p:blipFill>
+        </p:nvSpPr>
         <p:spPr>
           <a:xfrm>
-            <a:off x="6450000" y="1350000"/>
-            <a:ext cx="5300000" cy="4750000"/>
+            <a:off x="400000" y="4850000"/>
+            <a:ext cx="5600000" cy="1150000"/>
           </a:xfrm>
-          <a:prstGeom prst="rect">
-            <a:avLst/>
+          <a:prstGeom prst="roundRect">
+            <a:avLst>
+              <a:gd name="adj" fmla="val 8000"/>
+            </a:avLst>
           </a:prstGeom>
+          <a:solidFill>
+            <a:srgbClr val="FEF3C7"/>
+          </a:solidFill>
+          <a:ln w="19050">
+            <a:solidFill>
+              <a:srgbClr val="D97706"/>
+            </a:solidFill>
+          </a:ln>
         </p:spPr>
-      </p:pic>
+        <p:style>
+          <a:lnRef idx="1">
+            <a:schemeClr val="accent1"/>
+          </a:lnRef>
+          <a:fillRef idx="3">
+            <a:schemeClr val="accent1"/>
+          </a:fillRef>
+          <a:effectRef idx="2">
+            <a:schemeClr val="accent1"/>
+          </a:effectRef>
+          <a:fontRef idx="minor">
+            <a:schemeClr val="lt1"/>
+          </a:fontRef>
+        </p:style>
+        <p:txBody>
+          <a:bodyPr rtlCol="0" anchor="ctr" wrap="square"/>
+          <a:lstStyle/>
+          <a:p>
+            <a:pPr algn="ctr">
+              <a:spcAft>
+                <a:spcPts val="300"/>
+              </a:spcAft>
+              <a:buNone/>
+            </a:pPr>
+            <a:r>
+              <a:rPr sz="1100" b="1">
+                <a:solidFill>
+                  <a:srgbClr val="D97706"/>
+                </a:solidFill>
+              </a:rPr>
+              <a:t>KEY METROLOGICAL &amp; ECONOMIC INNOVATION</a:t>
+            </a:r>
+          </a:p>
+          <a:p>
+            <a:pPr>
+              <a:buNone/>
+            </a:pPr>
+            <a:r>
+              <a:rPr sz="1000" b="0">
+                <a:solidFill>
+                  <a:srgbClr val="0F172A"/>
+                </a:solidFill>
+              </a:rPr>
+              <a:t>Direct browser-to-indicator Web Serial API eliminates ₹50,000 proprietary hardware converters per mandi — runs on existing mandi weighbridge PCs with zero driver installation.</a:t>
+            </a:r>
+          </a:p>
+        </p:txBody>
+      </p:sp>
+      <p:sp>
+        <p:nvSpPr>
+          <p:cNvPr id="15364" name="Rounded Rectangle 15363"/>
+          <p:cNvSpPr/>
+          <p:nvPr/>
+        </p:nvSpPr>
+        <p:spPr>
+          <a:xfrm>
+            <a:off x="6200000" y="1300000"/>
+            <a:ext cx="5500000" cy="1050000"/>
+          </a:xfrm>
+          <a:prstGeom prst="roundRect">
+            <a:avLst>
+              <a:gd name="adj" fmla="val 5000"/>
+            </a:avLst>
+          </a:prstGeom>
+          <a:solidFill>
+            <a:srgbClr val="1E3A5F"/>
+          </a:solidFill>
+          <a:ln>
+            <a:noFill/>
+          </a:ln>
+        </p:spPr>
+        <p:style>
+          <a:lnRef idx="1">
+            <a:schemeClr val="accent1"/>
+          </a:lnRef>
+          <a:fillRef idx="3">
+            <a:schemeClr val="accent1"/>
+          </a:fillRef>
+          <a:effectRef idx="2">
+            <a:schemeClr val="accent1"/>
+          </a:effectRef>
+          <a:fontRef idx="minor">
+            <a:schemeClr val="lt1"/>
+          </a:fontRef>
+        </p:style>
+        <p:txBody>
+          <a:bodyPr rtlCol="0" anchor="ctr" wrap="square" lIns="100000" rIns="100000" tIns="80000" bIns="80000"/>
+          <a:lstStyle/>
+          <a:p>
+            <a:pPr algn="ctr">
+              <a:spcAft>
+                <a:spcPts val="600"/>
+              </a:spcAft>
+              <a:buNone/>
+            </a:pPr>
+            <a:r>
+              <a:rPr sz="1300" b="1">
+                <a:solidFill>
+                  <a:srgbClr val="FFFFFF"/>
+                </a:solidFill>
+              </a:rPr>
+              <a:t>① OIML R-76 Compliant Engine</a:t>
+            </a:r>
+          </a:p>
+          <a:p>
+            <a:pPr algn="ctr">
+              <a:buNone/>
+            </a:pPr>
+            <a:r>
+              <a:rPr sz="1000" b="0">
+                <a:solidFill>
+                  <a:srgbClr val="FFFFFF"/>
+                </a:solidFill>
+              </a:rPr>
+              <a:t>Automated MPE calculations for Class I–IIII
+Multi-interval tare compensation • Tolerance validation</a:t>
+            </a:r>
+          </a:p>
+        </p:txBody>
+      </p:sp>
+      <p:sp>
+        <p:nvSpPr>
+          <p:cNvPr id="15365" name="Rounded Rectangle 15364"/>
+          <p:cNvSpPr/>
+          <p:nvPr/>
+        </p:nvSpPr>
+        <p:spPr>
+          <a:xfrm>
+            <a:off x="6200000" y="2450000"/>
+            <a:ext cx="5500000" cy="1050000"/>
+          </a:xfrm>
+          <a:prstGeom prst="roundRect">
+            <a:avLst>
+              <a:gd name="adj" fmla="val 5000"/>
+            </a:avLst>
+          </a:prstGeom>
+          <a:solidFill>
+            <a:srgbClr val="16528E"/>
+          </a:solidFill>
+          <a:ln>
+            <a:noFill/>
+          </a:ln>
+        </p:spPr>
+        <p:style>
+          <a:lnRef idx="1">
+            <a:schemeClr val="accent1"/>
+          </a:lnRef>
+          <a:fillRef idx="3">
+            <a:schemeClr val="accent1"/>
+          </a:fillRef>
+          <a:effectRef idx="2">
+            <a:schemeClr val="accent1"/>
+          </a:effectRef>
+          <a:fontRef idx="minor">
+            <a:schemeClr val="lt1"/>
+          </a:fontRef>
+        </p:style>
+        <p:txBody>
+          <a:bodyPr rtlCol="0" anchor="ctr" wrap="square" lIns="100000" rIns="100000" tIns="80000" bIns="80000"/>
+          <a:lstStyle/>
+          <a:p>
+            <a:pPr algn="ctr">
+              <a:spcAft>
+                <a:spcPts val="600"/>
+              </a:spcAft>
+              <a:buNone/>
+            </a:pPr>
+            <a:r>
+              <a:rPr sz="1300" b="1">
+                <a:solidFill>
+                  <a:srgbClr val="FFFFFF"/>
+                </a:solidFill>
+              </a:rPr>
+              <a:t>② Live RS-232 Telemetry</a:t>
+            </a:r>
+          </a:p>
+          <a:p>
+            <a:pPr algn="ctr">
+              <a:buNone/>
+            </a:pPr>
+            <a:r>
+              <a:rPr sz="1000" b="0">
+                <a:solidFill>
+                  <a:srgbClr val="FFFFFF"/>
+                </a:solidFill>
+              </a:rPr>
+              <a:t>Real-time weight capture from Mettler Toledo SICS,
+Avery Weigh-Tronix &amp; Essae indicators • Zero typing errors</a:t>
+            </a:r>
+          </a:p>
+        </p:txBody>
+      </p:sp>
+      <p:sp>
+        <p:nvSpPr>
+          <p:cNvPr id="15366" name="Rounded Rectangle 15365"/>
+          <p:cNvSpPr/>
+          <p:nvPr/>
+        </p:nvSpPr>
+        <p:spPr>
+          <a:xfrm>
+            <a:off x="6200000" y="3600000"/>
+            <a:ext cx="5500000" cy="1050000"/>
+          </a:xfrm>
+          <a:prstGeom prst="roundRect">
+            <a:avLst>
+              <a:gd name="adj" fmla="val 5000"/>
+            </a:avLst>
+          </a:prstGeom>
+          <a:solidFill>
+            <a:srgbClr val="0D9688"/>
+          </a:solidFill>
+          <a:ln>
+            <a:noFill/>
+          </a:ln>
+        </p:spPr>
+        <p:style>
+          <a:lnRef idx="1">
+            <a:schemeClr val="accent1"/>
+          </a:lnRef>
+          <a:fillRef idx="3">
+            <a:schemeClr val="accent1"/>
+          </a:fillRef>
+          <a:effectRef idx="2">
+            <a:schemeClr val="accent1"/>
+          </a:effectRef>
+          <a:fontRef idx="minor">
+            <a:schemeClr val="lt1"/>
+          </a:fontRef>
+        </p:style>
+        <p:txBody>
+          <a:bodyPr rtlCol="0" anchor="ctr" wrap="square" lIns="100000" rIns="100000" tIns="80000" bIns="80000"/>
+          <a:lstStyle/>
+          <a:p>
+            <a:pPr algn="ctr">
+              <a:spcAft>
+                <a:spcPts val="600"/>
+              </a:spcAft>
+              <a:buNone/>
+            </a:pPr>
+            <a:r>
+              <a:rPr sz="1300" b="1">
+                <a:solidFill>
+                  <a:srgbClr val="FFFFFF"/>
+                </a:solidFill>
+              </a:rPr>
+              <a:t>③ Tamper-Proof Digital Certificates</a:t>
+            </a:r>
+          </a:p>
+          <a:p>
+            <a:pPr algn="ctr">
+              <a:buNone/>
+            </a:pPr>
+            <a:r>
+              <a:rPr sz="1000" b="0">
+                <a:solidFill>
+                  <a:srgbClr val="FFFFFF"/>
+                </a:solidFill>
+              </a:rPr>
+              <a:t>HMAC-SHA256 cryptographic seals • QR verification
+Public portal at /verify/:certificateNo • Immutable audit trail</a:t>
+            </a:r>
+          </a:p>
+        </p:txBody>
+      </p:sp>
+      <p:sp>
+        <p:nvSpPr>
+          <p:cNvPr id="15367" name="Rounded Rectangle 15366"/>
+          <p:cNvSpPr/>
+          <p:nvPr/>
+        </p:nvSpPr>
+        <p:spPr>
+          <a:xfrm>
+            <a:off x="6200000" y="4750000"/>
+            <a:ext cx="5500000" cy="1050000"/>
+          </a:xfrm>
+          <a:prstGeom prst="roundRect">
+            <a:avLst>
+              <a:gd name="adj" fmla="val 5000"/>
+            </a:avLst>
+          </a:prstGeom>
+          <a:solidFill>
+            <a:srgbClr val="D97706"/>
+          </a:solidFill>
+          <a:ln>
+            <a:noFill/>
+          </a:ln>
+        </p:spPr>
+        <p:style>
+          <a:lnRef idx="1">
+            <a:schemeClr val="accent1"/>
+          </a:lnRef>
+          <a:fillRef idx="3">
+            <a:schemeClr val="accent1"/>
+          </a:fillRef>
+          <a:effectRef idx="2">
+            <a:schemeClr val="accent1"/>
+          </a:effectRef>
+          <a:fontRef idx="minor">
+            <a:schemeClr val="lt1"/>
+          </a:fontRef>
+        </p:style>
+        <p:txBody>
+          <a:bodyPr rtlCol="0" anchor="ctr" wrap="square" lIns="100000" rIns="100000" tIns="80000" bIns="80000"/>
+          <a:lstStyle/>
+          <a:p>
+            <a:pPr algn="ctr">
+              <a:spcAft>
+                <a:spcPts val="600"/>
+              </a:spcAft>
+              <a:buNone/>
+            </a:pPr>
+            <a:r>
+              <a:rPr sz="1300" b="1">
+                <a:solidFill>
+                  <a:srgbClr val="FFFFFF"/>
+                </a:solidFill>
+              </a:rPr>
+              <a:t>④ Offline-First PWA</a:t>
+            </a:r>
+          </a:p>
+          <a:p>
+            <a:pPr algn="ctr">
+              <a:buNone/>
+            </a:pPr>
+            <a:r>
+              <a:rPr sz="1000" b="0">
+                <a:solidFill>
+                  <a:srgbClr val="FFFFFF"/>
+                </a:solidFill>
+              </a:rPr>
+              <a:t>IndexedDB local cache • Background auto-sync
+Works in zero-connectivity rural mandis • Zero data loss</a:t>
+            </a:r>
+          </a:p>
+        </p:txBody>
+      </p:sp>
     </p:spTree>
   </p:cSld>
   <p:clrMapOvr>
@@ -6601,12 +7017,12 @@
               <a:t/>
             </a:r>
             <a:r>
-              <a:rPr sz="2400" b="1">
+              <a:rPr sz="2200" b="1">
                 <a:solidFill>
                   <a:srgbClr val="1E3A5F"/>
                 </a:solidFill>
               </a:rPr>
-              <a:t>TECHNICAL APPROACH &amp; SYSTEM ARCHITECTURE</a:t>
+              <a:t>TECHNICAL APPROACH: System Architecture &amp; Stack</a:t>
             </a:r>
           </a:p>
         </p:txBody>
@@ -6622,7 +7038,7 @@
         <p:spPr bwMode="auto">
           <a:xfrm>
             <a:off x="400000" y="1150000"/>
-            <a:ext cx="11400000" cy="1500000"/>
+            <a:ext cx="11400000" cy="1400000"/>
           </a:xfrm>
           <a:prstGeom prst="rect">
             <a:avLst/>
@@ -6643,7 +7059,7 @@
           <a:p>
             <a:pPr marL="342900" indent="-342900" algn="just">
               <a:spcAft>
-                <a:spcPts val="200"/>
+                <a:spcPts val="300"/>
               </a:spcAft>
               <a:buNone/>
             </a:pPr>
@@ -6655,7 +7071,7 @@
               <a:t/>
             </a:r>
             <a:r>
-              <a:rPr b="1" sz="1100">
+              <a:rPr b="1" sz="1200">
                 <a:solidFill>
                   <a:srgbClr val="0F172A"/>
                 </a:solidFill>
@@ -6668,18 +7084,18 @@
                   <a:srgbClr val="334155"/>
                 </a:solidFill>
               </a:rPr>
-              <a:t>Browser Web Serial API reads continuous ASCII/HEX telemetry streams from Mettler Toledo (SICS), Avery Weigh-Tronix, and Essae indicators.</a:t>
+              <a:t>Browser Web Serial API reads continuous ASCII/HEX telemetry (9600 baud, 8-N-1) from Mettler Toledo SICS, Avery Weigh-Tronix &amp; Essae indicators.</a:t>
             </a:r>
           </a:p>
           <a:p>
             <a:pPr>
               <a:spcAft>
-                <a:spcPts val="200"/>
+                <a:spcPts val="300"/>
               </a:spcAft>
               <a:buNone/>
             </a:pPr>
             <a:r>
-              <a:rPr b="1" sz="1100">
+              <a:rPr b="1" sz="1200">
                 <a:solidFill>
                   <a:srgbClr val="0F172A"/>
                 </a:solidFill>
@@ -6692,23 +7108,23 @@
                   <a:srgbClr val="334155"/>
                 </a:solidFill>
               </a:rPr>
-              <a:t>React 18 PWA frontend + Node.js Express REST API + PostgreSQL 14 with Prisma ORM + PDFKit high-resolution certificate engine.</a:t>
+              <a:t>React 18 PWA + Node.js Express REST API + PostgreSQL 14 (Prisma ORM) + PDFKit certificate engine + HMAC-SHA256 signer.</a:t>
             </a:r>
           </a:p>
           <a:p>
             <a:pPr>
               <a:spcAft>
-                <a:spcPts val="200"/>
+                <a:spcPts val="300"/>
               </a:spcAft>
               <a:buNone/>
             </a:pPr>
             <a:r>
-              <a:rPr b="1" sz="1100">
+              <a:rPr b="1" sz="1200">
                 <a:solidFill>
                   <a:srgbClr val="0F172A"/>
                 </a:solidFill>
               </a:rPr>
-              <a:t>• Metrology &amp; Offline Stack: </a:t>
+              <a:t>• Metrology &amp; Offline: </a:t>
             </a:r>
             <a:r>
               <a:rPr b="0" sz="1100">
@@ -6716,7 +7132,7 @@
                   <a:srgbClr val="334155"/>
                 </a:solidFill>
               </a:rPr>
-              <a:t>OIML R-76 MPE computation engine, ISO GUM uncertainty budget (k=2), and IndexedDB queue with idempotent background sync for remote mandis.</a:t>
+              <a:t>OIML R-76 MPE engine (all 4 accuracy classes), ISO GUM uncertainty budget (k=2), IndexedDB queue with idempotent background sync.</a:t>
             </a:r>
           </a:p>
         </p:txBody>
@@ -6815,6 +7231,12 @@
           <a:prstGeom prst="ellipse">
             <a:avLst/>
           </a:prstGeom>
+          <a:solidFill>
+            <a:srgbClr val="1E3A5F"/>
+          </a:solidFill>
+          <a:ln>
+            <a:noFill/>
+          </a:ln>
         </p:spPr>
         <p:style>
           <a:lnRef idx="2">
@@ -6831,7 +7253,7 @@
           </a:fontRef>
         </p:style>
         <p:txBody>
-          <a:bodyPr rtlCol="0" anchor="ctr"/>
+          <a:bodyPr rtlCol="0" anchor="ctr" wrap="square"/>
           <a:lstStyle/>
           <a:p>
             <a:pPr algn="ctr">
@@ -6844,7 +7266,7 @@
             <a:r>
               <a:rPr sz="1000" b="1">
                 <a:solidFill>
-                  <a:srgbClr val="1E3A5F"/>
+                  <a:srgbClr val="FFFFFF"/>
                 </a:solidFill>
               </a:rPr>
               <a:t>Metrology
@@ -6884,30 +7306,1552 @@
           </a:prstGeom>
         </p:spPr>
       </p:pic>
-      <p:pic>
-        <p:nvPicPr>
-          <p:cNvPr id="17411" name="Picture 17410" descr="architecture_diagram_v2_1788429540812.jpg"/>
-          <p:cNvPicPr>
-            <a:picLocks noChangeAspect="1"/>
-          </p:cNvPicPr>
+      <p:sp>
+        <p:nvSpPr>
+          <p:cNvPr id="17411" name="Rounded Rectangle 17410"/>
+          <p:cNvSpPr/>
           <p:nvPr/>
-        </p:nvPicPr>
-        <p:blipFill>
-          <a:blip r:embed="rId4"/>
-          <a:stretch>
-            <a:fillRect/>
-          </a:stretch>
-        </p:blipFill>
+        </p:nvSpPr>
         <p:spPr>
           <a:xfrm>
-            <a:off x="1000000" y="2700000"/>
-            <a:ext cx="10200000" cy="3450000"/>
+            <a:off x="400000" y="2700000"/>
+            <a:ext cx="2600000" cy="450000"/>
           </a:xfrm>
-          <a:prstGeom prst="rect">
+          <a:prstGeom prst="roundRect">
+            <a:avLst>
+              <a:gd name="adj" fmla="val 10000"/>
+            </a:avLst>
+          </a:prstGeom>
+          <a:solidFill>
+            <a:srgbClr val="15803D"/>
+          </a:solidFill>
+          <a:ln>
+            <a:noFill/>
+          </a:ln>
+        </p:spPr>
+        <p:style>
+          <a:lnRef idx="1">
+            <a:schemeClr val="accent1"/>
+          </a:lnRef>
+          <a:fillRef idx="3">
+            <a:schemeClr val="accent1"/>
+          </a:fillRef>
+          <a:effectRef idx="2">
+            <a:schemeClr val="accent1"/>
+          </a:effectRef>
+          <a:fontRef idx="minor">
+            <a:schemeClr val="lt1"/>
+          </a:fontRef>
+        </p:style>
+        <p:txBody>
+          <a:bodyPr rtlCol="0" anchor="ctr" wrap="square"/>
+          <a:lstStyle/>
+          <a:p>
+            <a:pPr algn="ctr">
+              <a:buNone/>
+            </a:pPr>
+            <a:r>
+              <a:rPr sz="1100" b="1">
+                <a:solidFill>
+                  <a:srgbClr val="FFFFFF"/>
+                </a:solidFill>
+              </a:rPr>
+              <a:t>FIELD LAYER</a:t>
+            </a:r>
+          </a:p>
+        </p:txBody>
+      </p:sp>
+      <p:sp>
+        <p:nvSpPr>
+          <p:cNvPr id="17412" name="Rounded Rectangle 17411"/>
+          <p:cNvSpPr/>
+          <p:nvPr/>
+        </p:nvSpPr>
+        <p:spPr>
+          <a:xfrm>
+            <a:off x="450000" y="3230000"/>
+            <a:ext cx="2500000" cy="350000"/>
+          </a:xfrm>
+          <a:prstGeom prst="roundRect">
+            <a:avLst>
+              <a:gd name="adj" fmla="val 15000"/>
+            </a:avLst>
+          </a:prstGeom>
+          <a:solidFill>
+            <a:srgbClr val="F1F5F9"/>
+          </a:solidFill>
+          <a:ln w="19050">
+            <a:solidFill>
+              <a:srgbClr val="15803D"/>
+            </a:solidFill>
+          </a:ln>
+        </p:spPr>
+        <p:style>
+          <a:lnRef idx="1">
+            <a:schemeClr val="accent1"/>
+          </a:lnRef>
+          <a:fillRef idx="3">
+            <a:schemeClr val="accent1"/>
+          </a:fillRef>
+          <a:effectRef idx="2">
+            <a:schemeClr val="accent1"/>
+          </a:effectRef>
+          <a:fontRef idx="minor">
+            <a:schemeClr val="lt1"/>
+          </a:fontRef>
+        </p:style>
+        <p:txBody>
+          <a:bodyPr rtlCol="0" anchor="ctr" wrap="square"/>
+          <a:lstStyle/>
+          <a:p>
+            <a:pPr algn="ctr">
+              <a:buNone/>
+            </a:pPr>
+            <a:r>
+              <a:rPr sz="1000" b="1">
+                <a:solidFill>
+                  <a:srgbClr val="0F172A"/>
+                </a:solidFill>
+              </a:rPr>
+              <a:t>RS-232/USB Serial</a:t>
+            </a:r>
+          </a:p>
+        </p:txBody>
+      </p:sp>
+      <p:sp>
+        <p:nvSpPr>
+          <p:cNvPr id="17413" name="Rounded Rectangle 17412"/>
+          <p:cNvSpPr/>
+          <p:nvPr/>
+        </p:nvSpPr>
+        <p:spPr>
+          <a:xfrm>
+            <a:off x="450000" y="3630000"/>
+            <a:ext cx="2500000" cy="350000"/>
+          </a:xfrm>
+          <a:prstGeom prst="roundRect">
+            <a:avLst>
+              <a:gd name="adj" fmla="val 15000"/>
+            </a:avLst>
+          </a:prstGeom>
+          <a:solidFill>
+            <a:srgbClr val="F1F5F9"/>
+          </a:solidFill>
+          <a:ln w="19050">
+            <a:solidFill>
+              <a:srgbClr val="15803D"/>
+            </a:solidFill>
+          </a:ln>
+        </p:spPr>
+        <p:style>
+          <a:lnRef idx="1">
+            <a:schemeClr val="accent1"/>
+          </a:lnRef>
+          <a:fillRef idx="3">
+            <a:schemeClr val="accent1"/>
+          </a:fillRef>
+          <a:effectRef idx="2">
+            <a:schemeClr val="accent1"/>
+          </a:effectRef>
+          <a:fontRef idx="minor">
+            <a:schemeClr val="lt1"/>
+          </a:fontRef>
+        </p:style>
+        <p:txBody>
+          <a:bodyPr rtlCol="0" anchor="ctr" wrap="square"/>
+          <a:lstStyle/>
+          <a:p>
+            <a:pPr algn="ctr">
+              <a:buNone/>
+            </a:pPr>
+            <a:r>
+              <a:rPr sz="1000" b="1">
+                <a:solidFill>
+                  <a:srgbClr val="0F172A"/>
+                </a:solidFill>
+              </a:rPr>
+              <a:t>Weighing Indicators</a:t>
+            </a:r>
+          </a:p>
+        </p:txBody>
+      </p:sp>
+      <p:sp>
+        <p:nvSpPr>
+          <p:cNvPr id="17414" name="Rounded Rectangle 17413"/>
+          <p:cNvSpPr/>
+          <p:nvPr/>
+        </p:nvSpPr>
+        <p:spPr>
+          <a:xfrm>
+            <a:off x="450000" y="4030000"/>
+            <a:ext cx="2500000" cy="350000"/>
+          </a:xfrm>
+          <a:prstGeom prst="roundRect">
+            <a:avLst>
+              <a:gd name="adj" fmla="val 15000"/>
+            </a:avLst>
+          </a:prstGeom>
+          <a:solidFill>
+            <a:srgbClr val="F1F5F9"/>
+          </a:solidFill>
+          <a:ln w="19050">
+            <a:solidFill>
+              <a:srgbClr val="15803D"/>
+            </a:solidFill>
+          </a:ln>
+        </p:spPr>
+        <p:style>
+          <a:lnRef idx="1">
+            <a:schemeClr val="accent1"/>
+          </a:lnRef>
+          <a:fillRef idx="3">
+            <a:schemeClr val="accent1"/>
+          </a:fillRef>
+          <a:effectRef idx="2">
+            <a:schemeClr val="accent1"/>
+          </a:effectRef>
+          <a:fontRef idx="minor">
+            <a:schemeClr val="lt1"/>
+          </a:fontRef>
+        </p:style>
+        <p:txBody>
+          <a:bodyPr rtlCol="0" anchor="ctr" wrap="square"/>
+          <a:lstStyle/>
+          <a:p>
+            <a:pPr algn="ctr">
+              <a:buNone/>
+            </a:pPr>
+            <a:r>
+              <a:rPr sz="1000" b="1">
+                <a:solidFill>
+                  <a:srgbClr val="0F172A"/>
+                </a:solidFill>
+              </a:rPr>
+              <a:t>Mettler/Avery/Essae</a:t>
+            </a:r>
+          </a:p>
+        </p:txBody>
+      </p:sp>
+      <p:sp>
+        <p:nvSpPr>
+          <p:cNvPr id="17415" name="Rounded Rectangle 17414"/>
+          <p:cNvSpPr/>
+          <p:nvPr/>
+        </p:nvSpPr>
+        <p:spPr>
+          <a:xfrm>
+            <a:off x="450000" y="4430000"/>
+            <a:ext cx="2500000" cy="350000"/>
+          </a:xfrm>
+          <a:prstGeom prst="roundRect">
+            <a:avLst>
+              <a:gd name="adj" fmla="val 15000"/>
+            </a:avLst>
+          </a:prstGeom>
+          <a:solidFill>
+            <a:srgbClr val="F1F5F9"/>
+          </a:solidFill>
+          <a:ln w="19050">
+            <a:solidFill>
+              <a:srgbClr val="15803D"/>
+            </a:solidFill>
+          </a:ln>
+        </p:spPr>
+        <p:style>
+          <a:lnRef idx="1">
+            <a:schemeClr val="accent1"/>
+          </a:lnRef>
+          <a:fillRef idx="3">
+            <a:schemeClr val="accent1"/>
+          </a:fillRef>
+          <a:effectRef idx="2">
+            <a:schemeClr val="accent1"/>
+          </a:effectRef>
+          <a:fontRef idx="minor">
+            <a:schemeClr val="lt1"/>
+          </a:fontRef>
+        </p:style>
+        <p:txBody>
+          <a:bodyPr rtlCol="0" anchor="ctr" wrap="square"/>
+          <a:lstStyle/>
+          <a:p>
+            <a:pPr algn="ctr">
+              <a:buNone/>
+            </a:pPr>
+            <a:r>
+              <a:rPr sz="1000" b="1">
+                <a:solidFill>
+                  <a:srgbClr val="0F172A"/>
+                </a:solidFill>
+              </a:rPr>
+              <a:t>9600 baud 8-N-1</a:t>
+            </a:r>
+          </a:p>
+        </p:txBody>
+      </p:sp>
+      <p:sp>
+        <p:nvSpPr>
+          <p:cNvPr id="17416" name="Rounded Rectangle 17415"/>
+          <p:cNvSpPr/>
+          <p:nvPr/>
+        </p:nvSpPr>
+        <p:spPr>
+          <a:xfrm>
+            <a:off x="450000" y="4830000"/>
+            <a:ext cx="2500000" cy="350000"/>
+          </a:xfrm>
+          <a:prstGeom prst="roundRect">
+            <a:avLst>
+              <a:gd name="adj" fmla="val 15000"/>
+            </a:avLst>
+          </a:prstGeom>
+          <a:solidFill>
+            <a:srgbClr val="F1F5F9"/>
+          </a:solidFill>
+          <a:ln w="19050">
+            <a:solidFill>
+              <a:srgbClr val="15803D"/>
+            </a:solidFill>
+          </a:ln>
+        </p:spPr>
+        <p:style>
+          <a:lnRef idx="1">
+            <a:schemeClr val="accent1"/>
+          </a:lnRef>
+          <a:fillRef idx="3">
+            <a:schemeClr val="accent1"/>
+          </a:fillRef>
+          <a:effectRef idx="2">
+            <a:schemeClr val="accent1"/>
+          </a:effectRef>
+          <a:fontRef idx="minor">
+            <a:schemeClr val="lt1"/>
+          </a:fontRef>
+        </p:style>
+        <p:txBody>
+          <a:bodyPr rtlCol="0" anchor="ctr" wrap="square"/>
+          <a:lstStyle/>
+          <a:p>
+            <a:pPr algn="ctr">
+              <a:buNone/>
+            </a:pPr>
+            <a:r>
+              <a:rPr sz="1000" b="1">
+                <a:solidFill>
+                  <a:srgbClr val="0F172A"/>
+                </a:solidFill>
+              </a:rPr>
+              <a:t>Real-Time Telemetry</a:t>
+            </a:r>
+          </a:p>
+        </p:txBody>
+      </p:sp>
+      <p:sp>
+        <p:nvSpPr>
+          <p:cNvPr id="17417" name="Rounded Rectangle 17416"/>
+          <p:cNvSpPr/>
+          <p:nvPr/>
+        </p:nvSpPr>
+        <p:spPr>
+          <a:xfrm>
+            <a:off x="3200000" y="2700000"/>
+            <a:ext cx="2600000" cy="450000"/>
+          </a:xfrm>
+          <a:prstGeom prst="roundRect">
+            <a:avLst>
+              <a:gd name="adj" fmla="val 10000"/>
+            </a:avLst>
+          </a:prstGeom>
+          <a:solidFill>
+            <a:srgbClr val="2563EB"/>
+          </a:solidFill>
+          <a:ln>
+            <a:noFill/>
+          </a:ln>
+        </p:spPr>
+        <p:style>
+          <a:lnRef idx="1">
+            <a:schemeClr val="accent1"/>
+          </a:lnRef>
+          <a:fillRef idx="3">
+            <a:schemeClr val="accent1"/>
+          </a:fillRef>
+          <a:effectRef idx="2">
+            <a:schemeClr val="accent1"/>
+          </a:effectRef>
+          <a:fontRef idx="minor">
+            <a:schemeClr val="lt1"/>
+          </a:fontRef>
+        </p:style>
+        <p:txBody>
+          <a:bodyPr rtlCol="0" anchor="ctr" wrap="square"/>
+          <a:lstStyle/>
+          <a:p>
+            <a:pPr algn="ctr">
+              <a:buNone/>
+            </a:pPr>
+            <a:r>
+              <a:rPr sz="1100" b="1">
+                <a:solidFill>
+                  <a:srgbClr val="FFFFFF"/>
+                </a:solidFill>
+              </a:rPr>
+              <a:t>PRESENTATION LAYER</a:t>
+            </a:r>
+          </a:p>
+        </p:txBody>
+      </p:sp>
+      <p:sp>
+        <p:nvSpPr>
+          <p:cNvPr id="17418" name="Rounded Rectangle 17417"/>
+          <p:cNvSpPr/>
+          <p:nvPr/>
+        </p:nvSpPr>
+        <p:spPr>
+          <a:xfrm>
+            <a:off x="3250000" y="3230000"/>
+            <a:ext cx="2500000" cy="350000"/>
+          </a:xfrm>
+          <a:prstGeom prst="roundRect">
+            <a:avLst>
+              <a:gd name="adj" fmla="val 15000"/>
+            </a:avLst>
+          </a:prstGeom>
+          <a:solidFill>
+            <a:srgbClr val="F1F5F9"/>
+          </a:solidFill>
+          <a:ln w="19050">
+            <a:solidFill>
+              <a:srgbClr val="2563EB"/>
+            </a:solidFill>
+          </a:ln>
+        </p:spPr>
+        <p:style>
+          <a:lnRef idx="1">
+            <a:schemeClr val="accent1"/>
+          </a:lnRef>
+          <a:fillRef idx="3">
+            <a:schemeClr val="accent1"/>
+          </a:fillRef>
+          <a:effectRef idx="2">
+            <a:schemeClr val="accent1"/>
+          </a:effectRef>
+          <a:fontRef idx="minor">
+            <a:schemeClr val="lt1"/>
+          </a:fontRef>
+        </p:style>
+        <p:txBody>
+          <a:bodyPr rtlCol="0" anchor="ctr" wrap="square"/>
+          <a:lstStyle/>
+          <a:p>
+            <a:pPr algn="ctr">
+              <a:buNone/>
+            </a:pPr>
+            <a:r>
+              <a:rPr sz="1000" b="1">
+                <a:solidFill>
+                  <a:srgbClr val="0F172A"/>
+                </a:solidFill>
+              </a:rPr>
+              <a:t>React 18 PWA</a:t>
+            </a:r>
+          </a:p>
+        </p:txBody>
+      </p:sp>
+      <p:sp>
+        <p:nvSpPr>
+          <p:cNvPr id="17419" name="Rounded Rectangle 17418"/>
+          <p:cNvSpPr/>
+          <p:nvPr/>
+        </p:nvSpPr>
+        <p:spPr>
+          <a:xfrm>
+            <a:off x="3250000" y="3630000"/>
+            <a:ext cx="2500000" cy="350000"/>
+          </a:xfrm>
+          <a:prstGeom prst="roundRect">
+            <a:avLst>
+              <a:gd name="adj" fmla="val 15000"/>
+            </a:avLst>
+          </a:prstGeom>
+          <a:solidFill>
+            <a:srgbClr val="F1F5F9"/>
+          </a:solidFill>
+          <a:ln w="19050">
+            <a:solidFill>
+              <a:srgbClr val="2563EB"/>
+            </a:solidFill>
+          </a:ln>
+        </p:spPr>
+        <p:style>
+          <a:lnRef idx="1">
+            <a:schemeClr val="accent1"/>
+          </a:lnRef>
+          <a:fillRef idx="3">
+            <a:schemeClr val="accent1"/>
+          </a:fillRef>
+          <a:effectRef idx="2">
+            <a:schemeClr val="accent1"/>
+          </a:effectRef>
+          <a:fontRef idx="minor">
+            <a:schemeClr val="lt1"/>
+          </a:fontRef>
+        </p:style>
+        <p:txBody>
+          <a:bodyPr rtlCol="0" anchor="ctr" wrap="square"/>
+          <a:lstStyle/>
+          <a:p>
+            <a:pPr algn="ctr">
+              <a:buNone/>
+            </a:pPr>
+            <a:r>
+              <a:rPr sz="1000" b="1">
+                <a:solidFill>
+                  <a:srgbClr val="0F172A"/>
+                </a:solidFill>
+              </a:rPr>
+              <a:t>Web Serial API</a:t>
+            </a:r>
+          </a:p>
+        </p:txBody>
+      </p:sp>
+      <p:sp>
+        <p:nvSpPr>
+          <p:cNvPr id="17420" name="Rounded Rectangle 17419"/>
+          <p:cNvSpPr/>
+          <p:nvPr/>
+        </p:nvSpPr>
+        <p:spPr>
+          <a:xfrm>
+            <a:off x="3250000" y="4030000"/>
+            <a:ext cx="2500000" cy="350000"/>
+          </a:xfrm>
+          <a:prstGeom prst="roundRect">
+            <a:avLst>
+              <a:gd name="adj" fmla="val 15000"/>
+            </a:avLst>
+          </a:prstGeom>
+          <a:solidFill>
+            <a:srgbClr val="F1F5F9"/>
+          </a:solidFill>
+          <a:ln w="19050">
+            <a:solidFill>
+              <a:srgbClr val="2563EB"/>
+            </a:solidFill>
+          </a:ln>
+        </p:spPr>
+        <p:style>
+          <a:lnRef idx="1">
+            <a:schemeClr val="accent1"/>
+          </a:lnRef>
+          <a:fillRef idx="3">
+            <a:schemeClr val="accent1"/>
+          </a:fillRef>
+          <a:effectRef idx="2">
+            <a:schemeClr val="accent1"/>
+          </a:effectRef>
+          <a:fontRef idx="minor">
+            <a:schemeClr val="lt1"/>
+          </a:fontRef>
+        </p:style>
+        <p:txBody>
+          <a:bodyPr rtlCol="0" anchor="ctr" wrap="square"/>
+          <a:lstStyle/>
+          <a:p>
+            <a:pPr algn="ctr">
+              <a:buNone/>
+            </a:pPr>
+            <a:r>
+              <a:rPr sz="1000" b="1">
+                <a:solidFill>
+                  <a:srgbClr val="0F172A"/>
+                </a:solidFill>
+              </a:rPr>
+              <a:t>IndexedDB Cache</a:t>
+            </a:r>
+          </a:p>
+        </p:txBody>
+      </p:sp>
+      <p:sp>
+        <p:nvSpPr>
+          <p:cNvPr id="17421" name="Rounded Rectangle 17420"/>
+          <p:cNvSpPr/>
+          <p:nvPr/>
+        </p:nvSpPr>
+        <p:spPr>
+          <a:xfrm>
+            <a:off x="3250000" y="4430000"/>
+            <a:ext cx="2500000" cy="350000"/>
+          </a:xfrm>
+          <a:prstGeom prst="roundRect">
+            <a:avLst>
+              <a:gd name="adj" fmla="val 15000"/>
+            </a:avLst>
+          </a:prstGeom>
+          <a:solidFill>
+            <a:srgbClr val="F1F5F9"/>
+          </a:solidFill>
+          <a:ln w="19050">
+            <a:solidFill>
+              <a:srgbClr val="2563EB"/>
+            </a:solidFill>
+          </a:ln>
+        </p:spPr>
+        <p:style>
+          <a:lnRef idx="1">
+            <a:schemeClr val="accent1"/>
+          </a:lnRef>
+          <a:fillRef idx="3">
+            <a:schemeClr val="accent1"/>
+          </a:fillRef>
+          <a:effectRef idx="2">
+            <a:schemeClr val="accent1"/>
+          </a:effectRef>
+          <a:fontRef idx="minor">
+            <a:schemeClr val="lt1"/>
+          </a:fontRef>
+        </p:style>
+        <p:txBody>
+          <a:bodyPr rtlCol="0" anchor="ctr" wrap="square"/>
+          <a:lstStyle/>
+          <a:p>
+            <a:pPr algn="ctr">
+              <a:buNone/>
+            </a:pPr>
+            <a:r>
+              <a:rPr sz="1000" b="1">
+                <a:solidFill>
+                  <a:srgbClr val="0F172A"/>
+                </a:solidFill>
+              </a:rPr>
+              <a:t>Service Worker</a:t>
+            </a:r>
+          </a:p>
+        </p:txBody>
+      </p:sp>
+      <p:sp>
+        <p:nvSpPr>
+          <p:cNvPr id="17422" name="Rounded Rectangle 17421"/>
+          <p:cNvSpPr/>
+          <p:nvPr/>
+        </p:nvSpPr>
+        <p:spPr>
+          <a:xfrm>
+            <a:off x="3250000" y="4830000"/>
+            <a:ext cx="2500000" cy="350000"/>
+          </a:xfrm>
+          <a:prstGeom prst="roundRect">
+            <a:avLst>
+              <a:gd name="adj" fmla="val 15000"/>
+            </a:avLst>
+          </a:prstGeom>
+          <a:solidFill>
+            <a:srgbClr val="F1F5F9"/>
+          </a:solidFill>
+          <a:ln w="19050">
+            <a:solidFill>
+              <a:srgbClr val="2563EB"/>
+            </a:solidFill>
+          </a:ln>
+        </p:spPr>
+        <p:style>
+          <a:lnRef idx="1">
+            <a:schemeClr val="accent1"/>
+          </a:lnRef>
+          <a:fillRef idx="3">
+            <a:schemeClr val="accent1"/>
+          </a:fillRef>
+          <a:effectRef idx="2">
+            <a:schemeClr val="accent1"/>
+          </a:effectRef>
+          <a:fontRef idx="minor">
+            <a:schemeClr val="lt1"/>
+          </a:fontRef>
+        </p:style>
+        <p:txBody>
+          <a:bodyPr rtlCol="0" anchor="ctr" wrap="square"/>
+          <a:lstStyle/>
+          <a:p>
+            <a:pPr algn="ctr">
+              <a:buNone/>
+            </a:pPr>
+            <a:r>
+              <a:rPr sz="1000" b="1">
+                <a:solidFill>
+                  <a:srgbClr val="0F172A"/>
+                </a:solidFill>
+              </a:rPr>
+              <a:t>Zustand State Store</a:t>
+            </a:r>
+          </a:p>
+        </p:txBody>
+      </p:sp>
+      <p:sp>
+        <p:nvSpPr>
+          <p:cNvPr id="17423" name="Rounded Rectangle 17422"/>
+          <p:cNvSpPr/>
+          <p:nvPr/>
+        </p:nvSpPr>
+        <p:spPr>
+          <a:xfrm>
+            <a:off x="6000000" y="2700000"/>
+            <a:ext cx="2600000" cy="450000"/>
+          </a:xfrm>
+          <a:prstGeom prst="roundRect">
+            <a:avLst>
+              <a:gd name="adj" fmla="val 10000"/>
+            </a:avLst>
+          </a:prstGeom>
+          <a:solidFill>
+            <a:srgbClr val="1E3A5F"/>
+          </a:solidFill>
+          <a:ln>
+            <a:noFill/>
+          </a:ln>
+        </p:spPr>
+        <p:style>
+          <a:lnRef idx="1">
+            <a:schemeClr val="accent1"/>
+          </a:lnRef>
+          <a:fillRef idx="3">
+            <a:schemeClr val="accent1"/>
+          </a:fillRef>
+          <a:effectRef idx="2">
+            <a:schemeClr val="accent1"/>
+          </a:effectRef>
+          <a:fontRef idx="minor">
+            <a:schemeClr val="lt1"/>
+          </a:fontRef>
+        </p:style>
+        <p:txBody>
+          <a:bodyPr rtlCol="0" anchor="ctr" wrap="square"/>
+          <a:lstStyle/>
+          <a:p>
+            <a:pPr algn="ctr">
+              <a:buNone/>
+            </a:pPr>
+            <a:r>
+              <a:rPr sz="1100" b="1">
+                <a:solidFill>
+                  <a:srgbClr val="FFFFFF"/>
+                </a:solidFill>
+              </a:rPr>
+              <a:t>APPLICATION LAYER</a:t>
+            </a:r>
+          </a:p>
+        </p:txBody>
+      </p:sp>
+      <p:sp>
+        <p:nvSpPr>
+          <p:cNvPr id="17424" name="Rounded Rectangle 17423"/>
+          <p:cNvSpPr/>
+          <p:nvPr/>
+        </p:nvSpPr>
+        <p:spPr>
+          <a:xfrm>
+            <a:off x="6050000" y="3230000"/>
+            <a:ext cx="2500000" cy="350000"/>
+          </a:xfrm>
+          <a:prstGeom prst="roundRect">
+            <a:avLst>
+              <a:gd name="adj" fmla="val 15000"/>
+            </a:avLst>
+          </a:prstGeom>
+          <a:solidFill>
+            <a:srgbClr val="F1F5F9"/>
+          </a:solidFill>
+          <a:ln w="19050">
+            <a:solidFill>
+              <a:srgbClr val="1E3A5F"/>
+            </a:solidFill>
+          </a:ln>
+        </p:spPr>
+        <p:style>
+          <a:lnRef idx="1">
+            <a:schemeClr val="accent1"/>
+          </a:lnRef>
+          <a:fillRef idx="3">
+            <a:schemeClr val="accent1"/>
+          </a:fillRef>
+          <a:effectRef idx="2">
+            <a:schemeClr val="accent1"/>
+          </a:effectRef>
+          <a:fontRef idx="minor">
+            <a:schemeClr val="lt1"/>
+          </a:fontRef>
+        </p:style>
+        <p:txBody>
+          <a:bodyPr rtlCol="0" anchor="ctr" wrap="square"/>
+          <a:lstStyle/>
+          <a:p>
+            <a:pPr algn="ctr">
+              <a:buNone/>
+            </a:pPr>
+            <a:r>
+              <a:rPr sz="1000" b="1">
+                <a:solidFill>
+                  <a:srgbClr val="0F172A"/>
+                </a:solidFill>
+              </a:rPr>
+              <a:t>OIML R-76 Engine</a:t>
+            </a:r>
+          </a:p>
+        </p:txBody>
+      </p:sp>
+      <p:sp>
+        <p:nvSpPr>
+          <p:cNvPr id="17425" name="Rounded Rectangle 17424"/>
+          <p:cNvSpPr/>
+          <p:nvPr/>
+        </p:nvSpPr>
+        <p:spPr>
+          <a:xfrm>
+            <a:off x="6050000" y="3630000"/>
+            <a:ext cx="2500000" cy="350000"/>
+          </a:xfrm>
+          <a:prstGeom prst="roundRect">
+            <a:avLst>
+              <a:gd name="adj" fmla="val 15000"/>
+            </a:avLst>
+          </a:prstGeom>
+          <a:solidFill>
+            <a:srgbClr val="F1F5F9"/>
+          </a:solidFill>
+          <a:ln w="19050">
+            <a:solidFill>
+              <a:srgbClr val="1E3A5F"/>
+            </a:solidFill>
+          </a:ln>
+        </p:spPr>
+        <p:style>
+          <a:lnRef idx="1">
+            <a:schemeClr val="accent1"/>
+          </a:lnRef>
+          <a:fillRef idx="3">
+            <a:schemeClr val="accent1"/>
+          </a:fillRef>
+          <a:effectRef idx="2">
+            <a:schemeClr val="accent1"/>
+          </a:effectRef>
+          <a:fontRef idx="minor">
+            <a:schemeClr val="lt1"/>
+          </a:fontRef>
+        </p:style>
+        <p:txBody>
+          <a:bodyPr rtlCol="0" anchor="ctr" wrap="square"/>
+          <a:lstStyle/>
+          <a:p>
+            <a:pPr algn="ctr">
+              <a:buNone/>
+            </a:pPr>
+            <a:r>
+              <a:rPr sz="1000" b="1">
+                <a:solidFill>
+                  <a:srgbClr val="0F172A"/>
+                </a:solidFill>
+              </a:rPr>
+              <a:t>Uncertainty Calc</a:t>
+            </a:r>
+          </a:p>
+        </p:txBody>
+      </p:sp>
+      <p:sp>
+        <p:nvSpPr>
+          <p:cNvPr id="17426" name="Rounded Rectangle 17425"/>
+          <p:cNvSpPr/>
+          <p:nvPr/>
+        </p:nvSpPr>
+        <p:spPr>
+          <a:xfrm>
+            <a:off x="6050000" y="4030000"/>
+            <a:ext cx="2500000" cy="350000"/>
+          </a:xfrm>
+          <a:prstGeom prst="roundRect">
+            <a:avLst>
+              <a:gd name="adj" fmla="val 15000"/>
+            </a:avLst>
+          </a:prstGeom>
+          <a:solidFill>
+            <a:srgbClr val="F1F5F9"/>
+          </a:solidFill>
+          <a:ln w="19050">
+            <a:solidFill>
+              <a:srgbClr val="1E3A5F"/>
+            </a:solidFill>
+          </a:ln>
+        </p:spPr>
+        <p:style>
+          <a:lnRef idx="1">
+            <a:schemeClr val="accent1"/>
+          </a:lnRef>
+          <a:fillRef idx="3">
+            <a:schemeClr val="accent1"/>
+          </a:fillRef>
+          <a:effectRef idx="2">
+            <a:schemeClr val="accent1"/>
+          </a:effectRef>
+          <a:fontRef idx="minor">
+            <a:schemeClr val="lt1"/>
+          </a:fontRef>
+        </p:style>
+        <p:txBody>
+          <a:bodyPr rtlCol="0" anchor="ctr" wrap="square"/>
+          <a:lstStyle/>
+          <a:p>
+            <a:pPr algn="ctr">
+              <a:buNone/>
+            </a:pPr>
+            <a:r>
+              <a:rPr sz="1000" b="1">
+                <a:solidFill>
+                  <a:srgbClr val="0F172A"/>
+                </a:solidFill>
+              </a:rPr>
+              <a:t>PDFKit Generator</a:t>
+            </a:r>
+          </a:p>
+        </p:txBody>
+      </p:sp>
+      <p:sp>
+        <p:nvSpPr>
+          <p:cNvPr id="17427" name="Rounded Rectangle 17426"/>
+          <p:cNvSpPr/>
+          <p:nvPr/>
+        </p:nvSpPr>
+        <p:spPr>
+          <a:xfrm>
+            <a:off x="6050000" y="4430000"/>
+            <a:ext cx="2500000" cy="350000"/>
+          </a:xfrm>
+          <a:prstGeom prst="roundRect">
+            <a:avLst>
+              <a:gd name="adj" fmla="val 15000"/>
+            </a:avLst>
+          </a:prstGeom>
+          <a:solidFill>
+            <a:srgbClr val="F1F5F9"/>
+          </a:solidFill>
+          <a:ln w="19050">
+            <a:solidFill>
+              <a:srgbClr val="1E3A5F"/>
+            </a:solidFill>
+          </a:ln>
+        </p:spPr>
+        <p:style>
+          <a:lnRef idx="1">
+            <a:schemeClr val="accent1"/>
+          </a:lnRef>
+          <a:fillRef idx="3">
+            <a:schemeClr val="accent1"/>
+          </a:fillRef>
+          <a:effectRef idx="2">
+            <a:schemeClr val="accent1"/>
+          </a:effectRef>
+          <a:fontRef idx="minor">
+            <a:schemeClr val="lt1"/>
+          </a:fontRef>
+        </p:style>
+        <p:txBody>
+          <a:bodyPr rtlCol="0" anchor="ctr" wrap="square"/>
+          <a:lstStyle/>
+          <a:p>
+            <a:pPr algn="ctr">
+              <a:buNone/>
+            </a:pPr>
+            <a:r>
+              <a:rPr sz="1000" b="1">
+                <a:solidFill>
+                  <a:srgbClr val="0F172A"/>
+                </a:solidFill>
+              </a:rPr>
+              <a:t>HMAC-SHA256 Seal</a:t>
+            </a:r>
+          </a:p>
+        </p:txBody>
+      </p:sp>
+      <p:sp>
+        <p:nvSpPr>
+          <p:cNvPr id="17428" name="Rounded Rectangle 17427"/>
+          <p:cNvSpPr/>
+          <p:nvPr/>
+        </p:nvSpPr>
+        <p:spPr>
+          <a:xfrm>
+            <a:off x="6050000" y="4830000"/>
+            <a:ext cx="2500000" cy="350000"/>
+          </a:xfrm>
+          <a:prstGeom prst="roundRect">
+            <a:avLst>
+              <a:gd name="adj" fmla="val 15000"/>
+            </a:avLst>
+          </a:prstGeom>
+          <a:solidFill>
+            <a:srgbClr val="F1F5F9"/>
+          </a:solidFill>
+          <a:ln w="19050">
+            <a:solidFill>
+              <a:srgbClr val="1E3A5F"/>
+            </a:solidFill>
+          </a:ln>
+        </p:spPr>
+        <p:style>
+          <a:lnRef idx="1">
+            <a:schemeClr val="accent1"/>
+          </a:lnRef>
+          <a:fillRef idx="3">
+            <a:schemeClr val="accent1"/>
+          </a:fillRef>
+          <a:effectRef idx="2">
+            <a:schemeClr val="accent1"/>
+          </a:effectRef>
+          <a:fontRef idx="minor">
+            <a:schemeClr val="lt1"/>
+          </a:fontRef>
+        </p:style>
+        <p:txBody>
+          <a:bodyPr rtlCol="0" anchor="ctr" wrap="square"/>
+          <a:lstStyle/>
+          <a:p>
+            <a:pPr algn="ctr">
+              <a:buNone/>
+            </a:pPr>
+            <a:r>
+              <a:rPr sz="1000" b="1">
+                <a:solidFill>
+                  <a:srgbClr val="0F172A"/>
+                </a:solidFill>
+              </a:rPr>
+              <a:t>Telemetry Simulator</a:t>
+            </a:r>
+          </a:p>
+        </p:txBody>
+      </p:sp>
+      <p:sp>
+        <p:nvSpPr>
+          <p:cNvPr id="17429" name="Rounded Rectangle 17428"/>
+          <p:cNvSpPr/>
+          <p:nvPr/>
+        </p:nvSpPr>
+        <p:spPr>
+          <a:xfrm>
+            <a:off x="8800000" y="2700000"/>
+            <a:ext cx="2600000" cy="450000"/>
+          </a:xfrm>
+          <a:prstGeom prst="roundRect">
+            <a:avLst>
+              <a:gd name="adj" fmla="val 10000"/>
+            </a:avLst>
+          </a:prstGeom>
+          <a:solidFill>
+            <a:srgbClr val="334155"/>
+          </a:solidFill>
+          <a:ln>
+            <a:noFill/>
+          </a:ln>
+        </p:spPr>
+        <p:style>
+          <a:lnRef idx="1">
+            <a:schemeClr val="accent1"/>
+          </a:lnRef>
+          <a:fillRef idx="3">
+            <a:schemeClr val="accent1"/>
+          </a:fillRef>
+          <a:effectRef idx="2">
+            <a:schemeClr val="accent1"/>
+          </a:effectRef>
+          <a:fontRef idx="minor">
+            <a:schemeClr val="lt1"/>
+          </a:fontRef>
+        </p:style>
+        <p:txBody>
+          <a:bodyPr rtlCol="0" anchor="ctr" wrap="square"/>
+          <a:lstStyle/>
+          <a:p>
+            <a:pPr algn="ctr">
+              <a:buNone/>
+            </a:pPr>
+            <a:r>
+              <a:rPr sz="1100" b="1">
+                <a:solidFill>
+                  <a:srgbClr val="FFFFFF"/>
+                </a:solidFill>
+              </a:rPr>
+              <a:t>DATA LAYER</a:t>
+            </a:r>
+          </a:p>
+        </p:txBody>
+      </p:sp>
+      <p:sp>
+        <p:nvSpPr>
+          <p:cNvPr id="17430" name="Rounded Rectangle 17429"/>
+          <p:cNvSpPr/>
+          <p:nvPr/>
+        </p:nvSpPr>
+        <p:spPr>
+          <a:xfrm>
+            <a:off x="8850000" y="3230000"/>
+            <a:ext cx="2500000" cy="350000"/>
+          </a:xfrm>
+          <a:prstGeom prst="roundRect">
+            <a:avLst>
+              <a:gd name="adj" fmla="val 15000"/>
+            </a:avLst>
+          </a:prstGeom>
+          <a:solidFill>
+            <a:srgbClr val="F1F5F9"/>
+          </a:solidFill>
+          <a:ln w="19050">
+            <a:solidFill>
+              <a:srgbClr val="334155"/>
+            </a:solidFill>
+          </a:ln>
+        </p:spPr>
+        <p:style>
+          <a:lnRef idx="1">
+            <a:schemeClr val="accent1"/>
+          </a:lnRef>
+          <a:fillRef idx="3">
+            <a:schemeClr val="accent1"/>
+          </a:fillRef>
+          <a:effectRef idx="2">
+            <a:schemeClr val="accent1"/>
+          </a:effectRef>
+          <a:fontRef idx="minor">
+            <a:schemeClr val="lt1"/>
+          </a:fontRef>
+        </p:style>
+        <p:txBody>
+          <a:bodyPr rtlCol="0" anchor="ctr" wrap="square"/>
+          <a:lstStyle/>
+          <a:p>
+            <a:pPr algn="ctr">
+              <a:buNone/>
+            </a:pPr>
+            <a:r>
+              <a:rPr sz="1000" b="1">
+                <a:solidFill>
+                  <a:srgbClr val="0F172A"/>
+                </a:solidFill>
+              </a:rPr>
+              <a:t>PostgreSQL 14</a:t>
+            </a:r>
+          </a:p>
+        </p:txBody>
+      </p:sp>
+      <p:sp>
+        <p:nvSpPr>
+          <p:cNvPr id="17431" name="Rounded Rectangle 17430"/>
+          <p:cNvSpPr/>
+          <p:nvPr/>
+        </p:nvSpPr>
+        <p:spPr>
+          <a:xfrm>
+            <a:off x="8850000" y="3630000"/>
+            <a:ext cx="2500000" cy="350000"/>
+          </a:xfrm>
+          <a:prstGeom prst="roundRect">
+            <a:avLst>
+              <a:gd name="adj" fmla="val 15000"/>
+            </a:avLst>
+          </a:prstGeom>
+          <a:solidFill>
+            <a:srgbClr val="F1F5F9"/>
+          </a:solidFill>
+          <a:ln w="19050">
+            <a:solidFill>
+              <a:srgbClr val="334155"/>
+            </a:solidFill>
+          </a:ln>
+        </p:spPr>
+        <p:style>
+          <a:lnRef idx="1">
+            <a:schemeClr val="accent1"/>
+          </a:lnRef>
+          <a:fillRef idx="3">
+            <a:schemeClr val="accent1"/>
+          </a:fillRef>
+          <a:effectRef idx="2">
+            <a:schemeClr val="accent1"/>
+          </a:effectRef>
+          <a:fontRef idx="minor">
+            <a:schemeClr val="lt1"/>
+          </a:fontRef>
+        </p:style>
+        <p:txBody>
+          <a:bodyPr rtlCol="0" anchor="ctr" wrap="square"/>
+          <a:lstStyle/>
+          <a:p>
+            <a:pPr algn="ctr">
+              <a:buNone/>
+            </a:pPr>
+            <a:r>
+              <a:rPr sz="1000" b="1">
+                <a:solidFill>
+                  <a:srgbClr val="0F172A"/>
+                </a:solidFill>
+              </a:rPr>
+              <a:t>Prisma ORM</a:t>
+            </a:r>
+          </a:p>
+        </p:txBody>
+      </p:sp>
+      <p:sp>
+        <p:nvSpPr>
+          <p:cNvPr id="17432" name="Rounded Rectangle 17431"/>
+          <p:cNvSpPr/>
+          <p:nvPr/>
+        </p:nvSpPr>
+        <p:spPr>
+          <a:xfrm>
+            <a:off x="8850000" y="4030000"/>
+            <a:ext cx="2500000" cy="350000"/>
+          </a:xfrm>
+          <a:prstGeom prst="roundRect">
+            <a:avLst>
+              <a:gd name="adj" fmla="val 15000"/>
+            </a:avLst>
+          </a:prstGeom>
+          <a:solidFill>
+            <a:srgbClr val="F1F5F9"/>
+          </a:solidFill>
+          <a:ln w="19050">
+            <a:solidFill>
+              <a:srgbClr val="334155"/>
+            </a:solidFill>
+          </a:ln>
+        </p:spPr>
+        <p:style>
+          <a:lnRef idx="1">
+            <a:schemeClr val="accent1"/>
+          </a:lnRef>
+          <a:fillRef idx="3">
+            <a:schemeClr val="accent1"/>
+          </a:fillRef>
+          <a:effectRef idx="2">
+            <a:schemeClr val="accent1"/>
+          </a:effectRef>
+          <a:fontRef idx="minor">
+            <a:schemeClr val="lt1"/>
+          </a:fontRef>
+        </p:style>
+        <p:txBody>
+          <a:bodyPr rtlCol="0" anchor="ctr" wrap="square"/>
+          <a:lstStyle/>
+          <a:p>
+            <a:pPr algn="ctr">
+              <a:buNone/>
+            </a:pPr>
+            <a:r>
+              <a:rPr sz="1000" b="1">
+                <a:solidFill>
+                  <a:srgbClr val="0F172A"/>
+                </a:solidFill>
+              </a:rPr>
+              <a:t>Audit Logs</a:t>
+            </a:r>
+          </a:p>
+        </p:txBody>
+      </p:sp>
+      <p:sp>
+        <p:nvSpPr>
+          <p:cNvPr id="17433" name="Rounded Rectangle 17432"/>
+          <p:cNvSpPr/>
+          <p:nvPr/>
+        </p:nvSpPr>
+        <p:spPr>
+          <a:xfrm>
+            <a:off x="8850000" y="4430000"/>
+            <a:ext cx="2500000" cy="350000"/>
+          </a:xfrm>
+          <a:prstGeom prst="roundRect">
+            <a:avLst>
+              <a:gd name="adj" fmla="val 15000"/>
+            </a:avLst>
+          </a:prstGeom>
+          <a:solidFill>
+            <a:srgbClr val="F1F5F9"/>
+          </a:solidFill>
+          <a:ln w="19050">
+            <a:solidFill>
+              <a:srgbClr val="334155"/>
+            </a:solidFill>
+          </a:ln>
+        </p:spPr>
+        <p:style>
+          <a:lnRef idx="1">
+            <a:schemeClr val="accent1"/>
+          </a:lnRef>
+          <a:fillRef idx="3">
+            <a:schemeClr val="accent1"/>
+          </a:fillRef>
+          <a:effectRef idx="2">
+            <a:schemeClr val="accent1"/>
+          </a:effectRef>
+          <a:fontRef idx="minor">
+            <a:schemeClr val="lt1"/>
+          </a:fontRef>
+        </p:style>
+        <p:txBody>
+          <a:bodyPr rtlCol="0" anchor="ctr" wrap="square"/>
+          <a:lstStyle/>
+          <a:p>
+            <a:pPr algn="ctr">
+              <a:buNone/>
+            </a:pPr>
+            <a:r>
+              <a:rPr sz="1000" b="1">
+                <a:solidFill>
+                  <a:srgbClr val="0F172A"/>
+                </a:solidFill>
+              </a:rPr>
+              <a:t>Certificate Store</a:t>
+            </a:r>
+          </a:p>
+        </p:txBody>
+      </p:sp>
+      <p:sp>
+        <p:nvSpPr>
+          <p:cNvPr id="17434" name="Rounded Rectangle 17433"/>
+          <p:cNvSpPr/>
+          <p:nvPr/>
+        </p:nvSpPr>
+        <p:spPr>
+          <a:xfrm>
+            <a:off x="8850000" y="4830000"/>
+            <a:ext cx="2500000" cy="350000"/>
+          </a:xfrm>
+          <a:prstGeom prst="roundRect">
+            <a:avLst>
+              <a:gd name="adj" fmla="val 15000"/>
+            </a:avLst>
+          </a:prstGeom>
+          <a:solidFill>
+            <a:srgbClr val="F1F5F9"/>
+          </a:solidFill>
+          <a:ln w="19050">
+            <a:solidFill>
+              <a:srgbClr val="334155"/>
+            </a:solidFill>
+          </a:ln>
+        </p:spPr>
+        <p:style>
+          <a:lnRef idx="1">
+            <a:schemeClr val="accent1"/>
+          </a:lnRef>
+          <a:fillRef idx="3">
+            <a:schemeClr val="accent1"/>
+          </a:fillRef>
+          <a:effectRef idx="2">
+            <a:schemeClr val="accent1"/>
+          </a:effectRef>
+          <a:fontRef idx="minor">
+            <a:schemeClr val="lt1"/>
+          </a:fontRef>
+        </p:style>
+        <p:txBody>
+          <a:bodyPr rtlCol="0" anchor="ctr" wrap="square"/>
+          <a:lstStyle/>
+          <a:p>
+            <a:pPr algn="ctr">
+              <a:buNone/>
+            </a:pPr>
+            <a:r>
+              <a:rPr sz="1000" b="1">
+                <a:solidFill>
+                  <a:srgbClr val="0F172A"/>
+                </a:solidFill>
+              </a:rPr>
+              <a:t>SHA-256 Hash Ledger</a:t>
+            </a:r>
+          </a:p>
+        </p:txBody>
+      </p:sp>
+      <p:sp>
+        <p:nvSpPr>
+          <p:cNvPr id="17435" name="Right Arrow 17434"/>
+          <p:cNvSpPr/>
+          <p:nvPr/>
+        </p:nvSpPr>
+        <p:spPr>
+          <a:xfrm>
+            <a:off x="3000000" y="2850000"/>
+            <a:ext cx="200000" cy="150000"/>
+          </a:xfrm>
+          <a:prstGeom prst="rightArrow">
             <a:avLst/>
           </a:prstGeom>
+          <a:solidFill>
+            <a:srgbClr val="D97706"/>
+          </a:solidFill>
+          <a:ln>
+            <a:noFill/>
+          </a:ln>
         </p:spPr>
-      </p:pic>
+        <p:style>
+          <a:lnRef idx="1">
+            <a:schemeClr val="accent1"/>
+          </a:lnRef>
+          <a:fillRef idx="3">
+            <a:schemeClr val="accent1"/>
+          </a:fillRef>
+          <a:effectRef idx="2">
+            <a:schemeClr val="accent1"/>
+          </a:effectRef>
+          <a:fontRef idx="minor">
+            <a:schemeClr val="lt1"/>
+          </a:fontRef>
+        </p:style>
+        <p:txBody>
+          <a:bodyPr rtlCol="0" anchor="ctr"/>
+          <a:lstStyle/>
+          <a:p>
+            <a:pPr algn="ctr"/>
+          </a:p>
+        </p:txBody>
+      </p:sp>
+      <p:sp>
+        <p:nvSpPr>
+          <p:cNvPr id="17436" name="Right Arrow 17435"/>
+          <p:cNvSpPr/>
+          <p:nvPr/>
+        </p:nvSpPr>
+        <p:spPr>
+          <a:xfrm>
+            <a:off x="5800000" y="2850000"/>
+            <a:ext cx="200000" cy="150000"/>
+          </a:xfrm>
+          <a:prstGeom prst="rightArrow">
+            <a:avLst/>
+          </a:prstGeom>
+          <a:solidFill>
+            <a:srgbClr val="D97706"/>
+          </a:solidFill>
+          <a:ln>
+            <a:noFill/>
+          </a:ln>
+        </p:spPr>
+        <p:style>
+          <a:lnRef idx="1">
+            <a:schemeClr val="accent1"/>
+          </a:lnRef>
+          <a:fillRef idx="3">
+            <a:schemeClr val="accent1"/>
+          </a:fillRef>
+          <a:effectRef idx="2">
+            <a:schemeClr val="accent1"/>
+          </a:effectRef>
+          <a:fontRef idx="minor">
+            <a:schemeClr val="lt1"/>
+          </a:fontRef>
+        </p:style>
+        <p:txBody>
+          <a:bodyPr rtlCol="0" anchor="ctr"/>
+          <a:lstStyle/>
+          <a:p>
+            <a:pPr algn="ctr"/>
+          </a:p>
+        </p:txBody>
+      </p:sp>
+      <p:sp>
+        <p:nvSpPr>
+          <p:cNvPr id="17437" name="Right Arrow 17436"/>
+          <p:cNvSpPr/>
+          <p:nvPr/>
+        </p:nvSpPr>
+        <p:spPr>
+          <a:xfrm>
+            <a:off x="8600000" y="2850000"/>
+            <a:ext cx="200000" cy="150000"/>
+          </a:xfrm>
+          <a:prstGeom prst="rightArrow">
+            <a:avLst/>
+          </a:prstGeom>
+          <a:solidFill>
+            <a:srgbClr val="D97706"/>
+          </a:solidFill>
+          <a:ln>
+            <a:noFill/>
+          </a:ln>
+        </p:spPr>
+        <p:style>
+          <a:lnRef idx="1">
+            <a:schemeClr val="accent1"/>
+          </a:lnRef>
+          <a:fillRef idx="3">
+            <a:schemeClr val="accent1"/>
+          </a:fillRef>
+          <a:effectRef idx="2">
+            <a:schemeClr val="accent1"/>
+          </a:effectRef>
+          <a:fontRef idx="minor">
+            <a:schemeClr val="lt1"/>
+          </a:fontRef>
+        </p:style>
+        <p:txBody>
+          <a:bodyPr rtlCol="0" anchor="ctr"/>
+          <a:lstStyle/>
+          <a:p>
+            <a:pPr algn="ctr"/>
+          </a:p>
+        </p:txBody>
+      </p:sp>
+      <p:sp>
+        <p:nvSpPr>
+          <p:cNvPr id="17438" name="Rounded Rectangle 17437"/>
+          <p:cNvSpPr/>
+          <p:nvPr/>
+        </p:nvSpPr>
+        <p:spPr>
+          <a:xfrm>
+            <a:off x="400000" y="5550000"/>
+            <a:ext cx="11400000" cy="500000"/>
+          </a:xfrm>
+          <a:prstGeom prst="roundRect">
+            <a:avLst>
+              <a:gd name="adj" fmla="val 15000"/>
+            </a:avLst>
+          </a:prstGeom>
+          <a:solidFill>
+            <a:srgbClr val="F1F5F9"/>
+          </a:solidFill>
+          <a:ln w="19050">
+            <a:solidFill>
+              <a:srgbClr val="1E3A5F"/>
+            </a:solidFill>
+          </a:ln>
+        </p:spPr>
+        <p:style>
+          <a:lnRef idx="1">
+            <a:schemeClr val="accent1"/>
+          </a:lnRef>
+          <a:fillRef idx="3">
+            <a:schemeClr val="accent1"/>
+          </a:fillRef>
+          <a:effectRef idx="2">
+            <a:schemeClr val="accent1"/>
+          </a:effectRef>
+          <a:fontRef idx="minor">
+            <a:schemeClr val="lt1"/>
+          </a:fontRef>
+        </p:style>
+        <p:txBody>
+          <a:bodyPr rtlCol="0" anchor="ctr" wrap="square"/>
+          <a:lstStyle/>
+          <a:p>
+            <a:pPr algn="ctr">
+              <a:buNone/>
+            </a:pPr>
+            <a:r>
+              <a:rPr sz="1100" b="1">
+                <a:solidFill>
+                  <a:srgbClr val="1E3A5F"/>
+                </a:solidFill>
+              </a:rPr>
+              <a:t>System Performance: &lt;15ms OIML MPE computation  |  100% Offline-capable PWA  |  Zero vendor-lock RS-232 parser  |  129/129 tests passing</a:t>
+            </a:r>
+          </a:p>
+        </p:txBody>
+      </p:sp>
     </p:spTree>
   </p:cSld>
   <p:clrMapOvr>
@@ -7044,12 +8988,12 @@
               <a:t/>
             </a:r>
             <a:r>
-              <a:rPr sz="2400" b="1">
+              <a:rPr sz="2200" b="1">
                 <a:solidFill>
                   <a:srgbClr val="1E3A5F"/>
                 </a:solidFill>
               </a:rPr>
-              <a:t>FEASIBILITY, RISK MITIGATION &amp; VIABILITY</a:t>
+              <a:t>FEASIBILITY AND VIABILITY: Risk Mitigation &amp; Deployment</a:t>
             </a:r>
           </a:p>
         </p:txBody>
@@ -7064,8 +9008,8 @@
         </p:nvSpPr>
         <p:spPr bwMode="auto">
           <a:xfrm>
-            <a:off x="400000" y="1300000"/>
-            <a:ext cx="5900000" cy="4900000"/>
+            <a:off x="400000" y="1150000"/>
+            <a:ext cx="11400000" cy="500000"/>
           </a:xfrm>
           <a:prstGeom prst="rect">
             <a:avLst/>
@@ -7091,11 +9035,11 @@
               <a:spcBef>
                 <a:spcPct val="0"/>
               </a:spcBef>
+              <a:spcAft>
+                <a:spcPct val="0"/>
+              </a:spcAft>
               <a:tabLst/>
               <a:defRPr/>
-              <a:spcAft>
-                <a:spcPts val="1000"/>
-              </a:spcAft>
               <a:buNone/>
             </a:pPr>
             <a:r>
@@ -7109,12 +9053,12 @@
               <a:t/>
             </a:r>
             <a:r>
-              <a:rPr sz="1800" b="1">
+              <a:rPr sz="1200" b="1">
                 <a:solidFill>
                   <a:srgbClr val="1E3A5F"/>
                 </a:solidFill>
               </a:rPr>
-              <a:t>Key Feasibility Pillars &amp; Risk Strategies</a:t>
+              <a:t>✅ Working Prototype: 15 core features built &amp; validated | 129/129 automated tests passing (100%) | Zero licensing cost (FOSS stack)</a:t>
             </a:r>
             <a:endParaRPr kumimoji="0" lang="en-US" sz="2800" b="0" i="0" u="none" strike="noStrike" kern="1200" cap="none" spc="0" normalizeH="0" baseline="0" noProof="0" dirty="0">
               <a:ln>
@@ -7130,102 +9074,6 @@
               <a:ea typeface="ＭＳ Ｐゴシック" pitchFamily="1" charset="-128"/>
               <a:cs typeface="Arial" pitchFamily="34" charset="0"/>
             </a:endParaRPr>
-          </a:p>
-          <a:p>
-            <a:pPr>
-              <a:spcAft>
-                <a:spcPts val="800"/>
-              </a:spcAft>
-              <a:buNone/>
-            </a:pPr>
-            <a:r>
-              <a:rPr b="1" sz="1200">
-                <a:solidFill>
-                  <a:srgbClr val="0F172A"/>
-                </a:solidFill>
-              </a:rPr>
-              <a:t>• Working Prototype Built: </a:t>
-            </a:r>
-            <a:r>
-              <a:rPr b="0" sz="1100">
-                <a:solidFill>
-                  <a:srgbClr val="334155"/>
-                </a:solidFill>
-              </a:rPr>
-              <a:t>All 15 core metrological features fully implemented and validated with 100% automated test pass rate (129/129 test cases passing).</a:t>
-            </a:r>
-          </a:p>
-          <a:p>
-            <a:pPr>
-              <a:spcAft>
-                <a:spcPts val="800"/>
-              </a:spcAft>
-              <a:buNone/>
-            </a:pPr>
-            <a:r>
-              <a:rPr b="1" sz="1200">
-                <a:solidFill>
-                  <a:srgbClr val="0F172A"/>
-                </a:solidFill>
-              </a:rPr>
-              <a:t>• Hardware Agnostic: </a:t>
-            </a:r>
-            <a:r>
-              <a:rPr b="0" sz="1100">
-                <a:solidFill>
-                  <a:srgbClr val="334155"/>
-                </a:solidFill>
-              </a:rPr>
-              <a:t>Protocol-agnostic serial parser interfaces with diverse vendor hardware; virtual simulator enables pre-deployment field training.</a:t>
-            </a:r>
-          </a:p>
-          <a:p>
-            <a:pPr>
-              <a:spcAft>
-                <a:spcPts val="800"/>
-              </a:spcAft>
-              <a:buNone/>
-            </a:pPr>
-            <a:r>
-              <a:rPr b="1" sz="1200">
-                <a:solidFill>
-                  <a:srgbClr val="0F172A"/>
-                </a:solidFill>
-              </a:rPr>
-              <a:t>• Remote Mandi Resilience: </a:t>
-            </a:r>
-            <a:r>
-              <a:rPr b="0" sz="1100">
-                <a:solidFill>
-                  <a:srgbClr val="334155"/>
-                </a:solidFill>
-              </a:rPr>
-              <a:t>Offline-first PWA with IndexedDB local caching allows full inspections in zero-connectivity rural yards with auto-sync upon reconnection.</a:t>
-            </a:r>
-          </a:p>
-          <a:p>
-            <a:pPr>
-              <a:spcAft>
-                <a:spcPts val="800"/>
-              </a:spcAft>
-              <a:buNone/>
-            </a:pPr>
-            <a:r>
-              <a:rPr b="1" sz="1200">
-                <a:solidFill>
-                  <a:srgbClr val="0F172A"/>
-                </a:solidFill>
-              </a:rPr>
-              <a:t>• Legal Metrology Compliance: </a:t>
-            </a:r>
-            <a:r>
-              <a:rPr b="0" sz="1100">
-                <a:solidFill>
-                  <a:srgbClr val="334155"/>
-                </a:solidFill>
-              </a:rPr>
-              <a:t>Conforms to OIML R-76 (Edition 2006/E) and the Legal Metrology (General) Rules 2011, including July 2026 amendments for high-capacity scales.</a:t>
-            </a:r>
           </a:p>
         </p:txBody>
       </p:sp>
@@ -7406,6 +9254,12 @@
           <a:prstGeom prst="ellipse">
             <a:avLst/>
           </a:prstGeom>
+          <a:solidFill>
+            <a:srgbClr val="1E3A5F"/>
+          </a:solidFill>
+          <a:ln>
+            <a:noFill/>
+          </a:ln>
         </p:spPr>
         <p:style>
           <a:lnRef idx="2">
@@ -7422,7 +9276,7 @@
           </a:fontRef>
         </p:style>
         <p:txBody>
-          <a:bodyPr rtlCol="0" anchor="ctr"/>
+          <a:bodyPr rtlCol="0" anchor="ctr" wrap="square"/>
           <a:lstStyle/>
           <a:p>
             <a:pPr algn="ctr">
@@ -7435,7 +9289,7 @@
             <a:r>
               <a:rPr sz="1000" b="1">
                 <a:solidFill>
-                  <a:srgbClr val="1E3A5F"/>
+                  <a:srgbClr val="FFFFFF"/>
                 </a:solidFill>
               </a:rPr>
               <a:t>Metrology
@@ -7475,30 +9329,403 @@
           </a:prstGeom>
         </p:spPr>
       </p:pic>
-      <p:pic>
-        <p:nvPicPr>
-          <p:cNvPr id="17411" name="Picture 17410" descr="feasibility_matrix_1788429979491.jpg"/>
-          <p:cNvPicPr>
-            <a:picLocks noChangeAspect="1"/>
-          </p:cNvPicPr>
+      <p:graphicFrame>
+        <p:nvGraphicFramePr>
+          <p:cNvPr id="17411" name="Table 17410"/>
+          <p:cNvGraphicFramePr>
+            <a:graphicFrameLocks noGrp="1"/>
+          </p:cNvGraphicFramePr>
           <p:nvPr/>
-        </p:nvPicPr>
-        <p:blipFill>
-          <a:blip r:embed="rId4"/>
-          <a:stretch>
-            <a:fillRect/>
-          </a:stretch>
-        </p:blipFill>
-        <p:spPr>
-          <a:xfrm>
-            <a:off x="6450000" y="1350000"/>
-            <a:ext cx="5300000" cy="4750000"/>
-          </a:xfrm>
-          <a:prstGeom prst="rect">
-            <a:avLst/>
-          </a:prstGeom>
-        </p:spPr>
-      </p:pic>
+        </p:nvGraphicFramePr>
+        <p:xfrm>
+          <a:off x="400000" y="1800000"/>
+          <a:ext cx="11400000" cy="4300000"/>
+        </p:xfrm>
+        <a:graphic>
+          <a:graphicData uri="http://schemas.openxmlformats.org/drawingml/2006/table">
+            <a:tbl>
+              <a:tblPr firstRow="1" bandRow="1">
+                <a:tableStyleId>{5C22544A-7EE6-4342-B048-85BDC9FD1C3A}</a:tableStyleId>
+              </a:tblPr>
+              <a:tblGrid>
+                <a:gridCol w="3800000"/>
+                <a:gridCol w="3800000"/>
+                <a:gridCol w="3800000"/>
+              </a:tblGrid>
+              <a:tr h="860000">
+                <a:tc>
+                  <a:txBody>
+                    <a:bodyPr wrap="square" lIns="50000" rIns="50000" tIns="30000" bIns="30000"/>
+                    <a:lstStyle/>
+                    <a:p>
+                      <a:pPr algn="ctr">
+                        <a:buNone/>
+                      </a:pPr>
+                      <a:r>
+                        <a:rPr sz="1200" b="1">
+                          <a:solidFill>
+                            <a:srgbClr val="FFFFFF"/>
+                          </a:solidFill>
+                        </a:rPr>
+                        <a:t>Feasibility Analysis ✅</a:t>
+                      </a:r>
+                    </a:p>
+                  </a:txBody>
+                  <a:tcPr>
+                    <a:solidFill>
+                      <a:srgbClr val="16A34A"/>
+                    </a:solidFill>
+                  </a:tcPr>
+                </a:tc>
+                <a:tc>
+                  <a:txBody>
+                    <a:bodyPr wrap="square" lIns="50000" rIns="50000" tIns="30000" bIns="30000"/>
+                    <a:lstStyle/>
+                    <a:p>
+                      <a:pPr algn="ctr">
+                        <a:buNone/>
+                      </a:pPr>
+                      <a:r>
+                        <a:rPr sz="1200" b="1">
+                          <a:solidFill>
+                            <a:srgbClr val="FFFFFF"/>
+                          </a:solidFill>
+                        </a:rPr>
+                        <a:t>Challenges &amp; Risks ⚠️</a:t>
+                      </a:r>
+                    </a:p>
+                  </a:txBody>
+                  <a:tcPr>
+                    <a:solidFill>
+                      <a:srgbClr val="B91C1C"/>
+                    </a:solidFill>
+                  </a:tcPr>
+                </a:tc>
+                <a:tc>
+                  <a:txBody>
+                    <a:bodyPr wrap="square" lIns="50000" rIns="50000" tIns="30000" bIns="30000"/>
+                    <a:lstStyle/>
+                    <a:p>
+                      <a:pPr algn="ctr">
+                        <a:buNone/>
+                      </a:pPr>
+                      <a:r>
+                        <a:rPr sz="1200" b="1">
+                          <a:solidFill>
+                            <a:srgbClr val="FFFFFF"/>
+                          </a:solidFill>
+                        </a:rPr>
+                        <a:t>Mitigation Strategies 🛡️</a:t>
+                      </a:r>
+                    </a:p>
+                  </a:txBody>
+                  <a:tcPr>
+                    <a:solidFill>
+                      <a:srgbClr val="1E3A5F"/>
+                    </a:solidFill>
+                  </a:tcPr>
+                </a:tc>
+              </a:tr>
+              <a:tr h="860000">
+                <a:tc>
+                  <a:txBody>
+                    <a:bodyPr wrap="square" lIns="50000" rIns="50000" tIns="30000" bIns="30000"/>
+                    <a:lstStyle/>
+                    <a:p>
+                      <a:pPr algn="l">
+                        <a:buNone/>
+                      </a:pPr>
+                      <a:r>
+                        <a:rPr sz="1000" b="0">
+                          <a:solidFill>
+                            <a:srgbClr val="0F172A"/>
+                          </a:solidFill>
+                        </a:rPr>
+                        <a:t>Technical: Sub-15ms OIML MPE computation across all 4 accuracy classes; ISO GUM uncertainty budget (k=2)</a:t>
+                      </a:r>
+                    </a:p>
+                  </a:txBody>
+                  <a:tcPr>
+                    <a:solidFill>
+                      <a:srgbClr val="F1F5F9"/>
+                    </a:solidFill>
+                  </a:tcPr>
+                </a:tc>
+                <a:tc>
+                  <a:txBody>
+                    <a:bodyPr wrap="square" lIns="50000" rIns="50000" tIns="30000" bIns="30000"/>
+                    <a:lstStyle/>
+                    <a:p>
+                      <a:pPr algn="l">
+                        <a:buNone/>
+                      </a:pPr>
+                      <a:r>
+                        <a:rPr sz="1000" b="0">
+                          <a:solidFill>
+                            <a:srgbClr val="7F1D1D"/>
+                          </a:solidFill>
+                        </a:rPr>
+                        <a:t>Legacy indicator protocol variance: Non-standard RS-232 ASCII formats across 1,656 mandis</a:t>
+                      </a:r>
+                    </a:p>
+                  </a:txBody>
+                  <a:tcPr>
+                    <a:solidFill>
+                      <a:srgbClr val="F1F5F9"/>
+                    </a:solidFill>
+                  </a:tcPr>
+                </a:tc>
+                <a:tc>
+                  <a:txBody>
+                    <a:bodyPr wrap="square" lIns="50000" rIns="50000" tIns="30000" bIns="30000"/>
+                    <a:lstStyle/>
+                    <a:p>
+                      <a:pPr algn="l">
+                        <a:buNone/>
+                      </a:pPr>
+                      <a:r>
+                        <a:rPr sz="1000" b="0">
+                          <a:solidFill>
+                            <a:srgbClr val="1E40AF"/>
+                          </a:solidFill>
+                        </a:rPr>
+                        <a:t>Protocol-agnostic regex parser with auto-baud detection (9600/4800) + virtual simulator fallback for field training</a:t>
+                      </a:r>
+                    </a:p>
+                  </a:txBody>
+                  <a:tcPr>
+                    <a:solidFill>
+                      <a:srgbClr val="F1F5F9"/>
+                    </a:solidFill>
+                  </a:tcPr>
+                </a:tc>
+              </a:tr>
+              <a:tr h="860000">
+                <a:tc>
+                  <a:txBody>
+                    <a:bodyPr wrap="square" lIns="50000" rIns="50000" tIns="30000" bIns="30000"/>
+                    <a:lstStyle/>
+                    <a:p>
+                      <a:pPr algn="l">
+                        <a:buNone/>
+                      </a:pPr>
+                      <a:r>
+                        <a:rPr sz="1000" b="0">
+                          <a:solidFill>
+                            <a:srgbClr val="0F172A"/>
+                          </a:solidFill>
+                        </a:rPr>
+                        <a:t>Operational: Offline PWA runs on any ₹10K Android tablet or refurbished laptop via Chrome browser</a:t>
+                      </a:r>
+                    </a:p>
+                  </a:txBody>
+                  <a:tcPr>
+                    <a:solidFill>
+                      <a:srgbClr val="FFFFFF"/>
+                    </a:solidFill>
+                  </a:tcPr>
+                </a:tc>
+                <a:tc>
+                  <a:txBody>
+                    <a:bodyPr wrap="square" lIns="50000" rIns="50000" tIns="30000" bIns="30000"/>
+                    <a:lstStyle/>
+                    <a:p>
+                      <a:pPr algn="l">
+                        <a:buNone/>
+                      </a:pPr>
+                      <a:r>
+                        <a:rPr sz="1000" b="0">
+                          <a:solidFill>
+                            <a:srgbClr val="7F1D1D"/>
+                          </a:solidFill>
+                        </a:rPr>
+                        <a:t>Zero 4G/WiFi coverage in remote agricultural mandi yards and rural warehouses</a:t>
+                      </a:r>
+                    </a:p>
+                  </a:txBody>
+                  <a:tcPr>
+                    <a:solidFill>
+                      <a:srgbClr val="FFFFFF"/>
+                    </a:solidFill>
+                  </a:tcPr>
+                </a:tc>
+                <a:tc>
+                  <a:txBody>
+                    <a:bodyPr wrap="square" lIns="50000" rIns="50000" tIns="30000" bIns="30000"/>
+                    <a:lstStyle/>
+                    <a:p>
+                      <a:pPr algn="l">
+                        <a:buNone/>
+                      </a:pPr>
+                      <a:r>
+                        <a:rPr sz="1000" b="0">
+                          <a:solidFill>
+                            <a:srgbClr val="1E40AF"/>
+                          </a:solidFill>
+                        </a:rPr>
+                        <a:t>IndexedDB offline transaction log with idempotent background auto-sync + SHA-256 conflict resolution on reconnect</a:t>
+                      </a:r>
+                    </a:p>
+                  </a:txBody>
+                  <a:tcPr>
+                    <a:solidFill>
+                      <a:srgbClr val="FFFFFF"/>
+                    </a:solidFill>
+                  </a:tcPr>
+                </a:tc>
+              </a:tr>
+              <a:tr h="860000">
+                <a:tc>
+                  <a:txBody>
+                    <a:bodyPr wrap="square" lIns="50000" rIns="50000" tIns="30000" bIns="30000"/>
+                    <a:lstStyle/>
+                    <a:p>
+                      <a:pPr algn="l">
+                        <a:buNone/>
+                      </a:pPr>
+                      <a:r>
+                        <a:rPr sz="1000" b="0">
+                          <a:solidFill>
+                            <a:srgbClr val="0F172A"/>
+                          </a:solidFill>
+                        </a:rPr>
+                        <a:t>Economic: Zero licensing fees (FOSS stack); no proprietary hardware adapters needed</a:t>
+                      </a:r>
+                    </a:p>
+                  </a:txBody>
+                  <a:tcPr>
+                    <a:solidFill>
+                      <a:srgbClr val="F1F5F9"/>
+                    </a:solidFill>
+                  </a:tcPr>
+                </a:tc>
+                <a:tc>
+                  <a:txBody>
+                    <a:bodyPr wrap="square" lIns="50000" rIns="50000" tIns="30000" bIns="30000"/>
+                    <a:lstStyle/>
+                    <a:p>
+                      <a:pPr algn="l">
+                        <a:buNone/>
+                      </a:pPr>
+                      <a:r>
+                        <a:rPr sz="1000" b="0">
+                          <a:solidFill>
+                            <a:srgbClr val="7F1D1D"/>
+                          </a:solidFill>
+                        </a:rPr>
+                        <a:t>Inspector resistance: Field officers hesitant to adopt digital certificates over familiar paper books</a:t>
+                      </a:r>
+                    </a:p>
+                  </a:txBody>
+                  <a:tcPr>
+                    <a:solidFill>
+                      <a:srgbClr val="F1F5F9"/>
+                    </a:solidFill>
+                  </a:tcPr>
+                </a:tc>
+                <a:tc>
+                  <a:txBody>
+                    <a:bodyPr wrap="square" lIns="50000" rIns="50000" tIns="30000" bIns="30000"/>
+                    <a:lstStyle/>
+                    <a:p>
+                      <a:pPr algn="l">
+                        <a:buNone/>
+                      </a:pPr>
+                      <a:r>
+                        <a:rPr sz="1000" b="0">
+                          <a:solidFill>
+                            <a:srgbClr val="1E40AF"/>
+                          </a:solidFill>
+                        </a:rPr>
+                        <a:t>3-step guided workflow reducing test entry to &lt;15 min + regional language UI (Hindi/Telugu/Marathi) + QR spot-checks</a:t>
+                      </a:r>
+                    </a:p>
+                  </a:txBody>
+                  <a:tcPr>
+                    <a:solidFill>
+                      <a:srgbClr val="F1F5F9"/>
+                    </a:solidFill>
+                  </a:tcPr>
+                </a:tc>
+              </a:tr>
+              <a:tr h="860000">
+                <a:tc>
+                  <a:txBody>
+                    <a:bodyPr wrap="square" lIns="50000" rIns="50000" tIns="30000" bIns="30000"/>
+                    <a:lstStyle/>
+                    <a:p>
+                      <a:pPr algn="l">
+                        <a:buNone/>
+                      </a:pPr>
+                      <a:r>
+                        <a:rPr sz="1000" b="0">
+                          <a:solidFill>
+                            <a:srgbClr val="0F172A"/>
+                          </a:solidFill>
+                        </a:rPr>
+                        <a:t>Regulatory: Conforms to OIML R-76 (2006/E) &amp; Legal Metrology Rules 2011 (incl. July 2026 amendments)</a:t>
+                      </a:r>
+                    </a:p>
+                  </a:txBody>
+                  <a:tcPr>
+                    <a:solidFill>
+                      <a:srgbClr val="FFFFFF"/>
+                    </a:solidFill>
+                  </a:tcPr>
+                </a:tc>
+                <a:tc>
+                  <a:txBody>
+                    <a:bodyPr wrap="square" lIns="50000" rIns="50000" tIns="30000" bIns="30000"/>
+                    <a:lstStyle/>
+                    <a:p>
+                      <a:pPr algn="l">
+                        <a:buNone/>
+                      </a:pPr>
+                      <a:r>
+                        <a:rPr sz="1000" b="0">
+                          <a:solidFill>
+                            <a:srgbClr val="7F1D1D"/>
+                          </a:solidFill>
+                        </a:rPr>
+                        <a:t>Certificate tampering and forgery risk for printed inspection slips at mandi gates</a:t>
+                      </a:r>
+                    </a:p>
+                  </a:txBody>
+                  <a:tcPr>
+                    <a:solidFill>
+                      <a:srgbClr val="FFFFFF"/>
+                    </a:solidFill>
+                  </a:tcPr>
+                </a:tc>
+                <a:tc>
+                  <a:txBody>
+                    <a:bodyPr wrap="square" lIns="50000" rIns="50000" tIns="30000" bIns="30000"/>
+                    <a:lstStyle/>
+                    <a:p>
+                      <a:pPr algn="l">
+                        <a:buNone/>
+                      </a:pPr>
+                      <a:r>
+                        <a:rPr sz="1000" b="0">
+                          <a:solidFill>
+                            <a:srgbClr val="1E40AF"/>
+                          </a:solidFill>
+                        </a:rPr>
+                        <a:t>HMAC-SHA256 cryptographic seal in offline-generated PDF + instant public QR verification at /verify/:certNo</a:t>
+                      </a:r>
+                    </a:p>
+                  </a:txBody>
+                  <a:tcPr>
+                    <a:solidFill>
+                      <a:srgbClr val="FFFFFF"/>
+                    </a:solidFill>
+                  </a:tcPr>
+                </a:tc>
+              </a:tr>
+            </a:tbl>
+          </a:graphicData>
+        </a:graphic>
+      </p:graphicFrame>
     </p:spTree>
     <p:extLst>
       <p:ext uri="{BB962C8B-B14F-4D97-AF65-F5344CB8AC3E}">
@@ -7640,12 +9867,12 @@
               <a:t/>
             </a:r>
             <a:r>
-              <a:rPr sz="2400" b="1">
+              <a:rPr sz="2200" b="1">
                 <a:solidFill>
                   <a:srgbClr val="1E3A5F"/>
                 </a:solidFill>
               </a:rPr>
-              <a:t>QUANTIFIED IMPACT &amp; NATIONAL BENEFITS</a:t>
+              <a:t>IMPACT AND BENEFITS: National Scale Outcomes</a:t>
             </a:r>
           </a:p>
         </p:txBody>
@@ -7661,7 +9888,7 @@
         <p:spPr bwMode="auto">
           <a:xfrm>
             <a:off x="400000" y="1150000"/>
-            <a:ext cx="11400000" cy="1500000"/>
+            <a:ext cx="11400000" cy="1800000"/>
           </a:xfrm>
           <a:prstGeom prst="rect">
             <a:avLst/>
@@ -7690,7 +9917,7 @@
               <a:tabLst/>
               <a:defRPr/>
               <a:spcAft>
-                <a:spcPts val="200"/>
+                <a:spcPts val="400"/>
               </a:spcAft>
               <a:buNone/>
             </a:pPr>
@@ -7712,12 +9939,12 @@
               <a:t/>
             </a:r>
             <a:r>
-              <a:rPr b="1" sz="1100">
+              <a:rPr b="1" sz="1200">
                 <a:solidFill>
                   <a:srgbClr val="0F172A"/>
                 </a:solidFill>
               </a:rPr>
-              <a:t>• 10x Faster Field Verification: </a:t>
+              <a:t>• Economic Savings: </a:t>
             </a:r>
             <a:r>
               <a:rPr b="0" sz="1100">
@@ -7725,23 +9952,23 @@
                   <a:srgbClr val="334155"/>
                 </a:solidFill>
               </a:rPr>
-              <a:t>Automated calculations reduce inspection duration from 2 hours to under 15 minutes per instrument, eliminating backlogs.</a:t>
+              <a:t>Eliminates ₹420+ Crores annual procurement weighing discrepancies; reduces inspector labor cost by 87% (from 2 hrs to &lt;15 min per instrument).</a:t>
             </a:r>
           </a:p>
           <a:p>
             <a:pPr>
               <a:spcAft>
-                <a:spcPts val="200"/>
+                <a:spcPts val="400"/>
               </a:spcAft>
               <a:buNone/>
             </a:pPr>
             <a:r>
-              <a:rPr b="1" sz="1100">
+              <a:rPr b="1" sz="1200">
                 <a:solidFill>
                   <a:srgbClr val="0F172A"/>
                 </a:solidFill>
               </a:rPr>
-              <a:t>• Protecting 1.80 Crore Farmers: </a:t>
+              <a:t>• Farmer Fraud Protection: </a:t>
             </a:r>
             <a:r>
               <a:rPr b="0" sz="1100">
@@ -7749,23 +9976,23 @@
                   <a:srgbClr val="334155"/>
                 </a:solidFill>
               </a:rPr>
-              <a:t>Guarantees accurate weighing across 1,656 e-NAM agricultural mandis nationwide (DoCA/e-NAM official data, June 2026).</a:t>
+              <a:t>Guarantees fair pricing for 1.80 Crore farmers across 1,656 e-NAM mandis; transparent dispute resolution via public QR scan of legal calibration seal.</a:t>
             </a:r>
           </a:p>
           <a:p>
             <a:pPr>
               <a:spcAft>
-                <a:spcPts val="200"/>
+                <a:spcPts val="400"/>
               </a:spcAft>
               <a:buNone/>
             </a:pPr>
             <a:r>
-              <a:rPr b="1" sz="1100">
+              <a:rPr b="1" sz="1200">
                 <a:solidFill>
                   <a:srgbClr val="0F172A"/>
                 </a:solidFill>
               </a:rPr>
-              <a:t>• 100% Tamper-Proof Legal Seals: </a:t>
+              <a:t>• Governance &amp; Environmental: </a:t>
             </a:r>
             <a:r>
               <a:rPr b="0" sz="1100">
@@ -7773,23 +10000,23 @@
                   <a:srgbClr val="334155"/>
                 </a:solidFill>
               </a:rPr>
-              <a:t>HMAC-SHA256 digital seals with instant public QR validation completely eliminate forged paper calibration certificates.</a:t>
+              <a:t>Eliminates 50+ lakh paper verification certificates annually; provides DoCA real-time national compliance heatmaps across all State Directorates.</a:t>
             </a:r>
           </a:p>
           <a:p>
             <a:pPr>
               <a:spcAft>
-                <a:spcPts val="200"/>
+                <a:spcPts val="400"/>
               </a:spcAft>
               <a:buNone/>
             </a:pPr>
             <a:r>
-              <a:rPr b="1" sz="1100">
+              <a:rPr b="1" sz="1200">
                 <a:solidFill>
                   <a:srgbClr val="0F172A"/>
                 </a:solidFill>
               </a:rPr>
-              <a:t>• Paperless E-Governance: </a:t>
+              <a:t>• Inspector Throughput: </a:t>
             </a:r>
             <a:r>
               <a:rPr b="0" sz="1100">
@@ -7797,7 +10024,7 @@
                   <a:srgbClr val="334155"/>
                 </a:solidFill>
               </a:rPr>
-              <a:t>Replaces multi-page carbon inspection forms with centralized, cryptographically auditable digital records across all State Directorates.</a:t>
+              <a:t>Increases daily inspector capacity from 4 weighbridges/day (manual) to 25+ weighbridges/day (digital), eliminating the national verification backlog.</a:t>
             </a:r>
           </a:p>
         </p:txBody>
@@ -7979,6 +10206,12 @@
           <a:prstGeom prst="ellipse">
             <a:avLst/>
           </a:prstGeom>
+          <a:solidFill>
+            <a:srgbClr val="1E3A5F"/>
+          </a:solidFill>
+          <a:ln>
+            <a:noFill/>
+          </a:ln>
         </p:spPr>
         <p:style>
           <a:lnRef idx="2">
@@ -7995,7 +10228,7 @@
           </a:fontRef>
         </p:style>
         <p:txBody>
-          <a:bodyPr rtlCol="0" anchor="ctr"/>
+          <a:bodyPr rtlCol="0" anchor="ctr" wrap="square"/>
           <a:lstStyle/>
           <a:p>
             <a:pPr algn="ctr">
@@ -8008,7 +10241,7 @@
             <a:r>
               <a:rPr sz="1000" b="1">
                 <a:solidFill>
-                  <a:srgbClr val="1E3A5F"/>
+                  <a:srgbClr val="FFFFFF"/>
                 </a:solidFill>
               </a:rPr>
               <a:t>Metrology
@@ -8048,30 +10281,394 @@
           </a:prstGeom>
         </p:spPr>
       </p:pic>
-      <p:pic>
-        <p:nvPicPr>
-          <p:cNvPr id="17411" name="Picture 17410" descr="impact_v2_1788429990425.jpg"/>
-          <p:cNvPicPr>
-            <a:picLocks noChangeAspect="1"/>
-          </p:cNvPicPr>
+      <p:sp>
+        <p:nvSpPr>
+          <p:cNvPr id="17411" name="Rounded Rectangle 17410"/>
+          <p:cNvSpPr/>
           <p:nvPr/>
-        </p:nvPicPr>
-        <p:blipFill>
-          <a:blip r:embed="rId4"/>
-          <a:stretch>
-            <a:fillRect/>
-          </a:stretch>
-        </p:blipFill>
+        </p:nvSpPr>
         <p:spPr>
           <a:xfrm>
-            <a:off x="1000000" y="2750000"/>
-            <a:ext cx="10200000" cy="3400000"/>
+            <a:off x="400000" y="3200000"/>
+            <a:ext cx="2650000" cy="2400000"/>
+          </a:xfrm>
+          <a:prstGeom prst="roundRect">
+            <a:avLst>
+              <a:gd name="adj" fmla="val 8000"/>
+            </a:avLst>
+          </a:prstGeom>
+          <a:solidFill>
+            <a:srgbClr val="16A34A"/>
+          </a:solidFill>
+          <a:ln>
+            <a:noFill/>
+          </a:ln>
+        </p:spPr>
+        <p:style>
+          <a:lnRef idx="1">
+            <a:schemeClr val="accent1"/>
+          </a:lnRef>
+          <a:fillRef idx="3">
+            <a:schemeClr val="accent1"/>
+          </a:fillRef>
+          <a:effectRef idx="2">
+            <a:schemeClr val="accent1"/>
+          </a:effectRef>
+          <a:fontRef idx="minor">
+            <a:schemeClr val="lt1"/>
+          </a:fontRef>
+        </p:style>
+        <p:txBody>
+          <a:bodyPr rtlCol="0" anchor="ctr" wrap="square" lIns="80000" rIns="80000" tIns="150000"/>
+          <a:lstStyle/>
+          <a:p>
+            <a:pPr algn="ctr">
+              <a:spcAft>
+                <a:spcPts val="200"/>
+              </a:spcAft>
+              <a:buNone/>
+            </a:pPr>
+            <a:r>
+              <a:rPr sz="3600" b="1">
+                <a:solidFill>
+                  <a:srgbClr val="FFFFFF"/>
+                </a:solidFill>
+              </a:rPr>
+              <a:t>10x</a:t>
+            </a:r>
+          </a:p>
+          <a:p>
+            <a:pPr algn="ctr">
+              <a:spcAft>
+                <a:spcPts val="600"/>
+              </a:spcAft>
+              <a:buNone/>
+            </a:pPr>
+            <a:r>
+              <a:rPr sz="1400" b="1">
+                <a:solidFill>
+                  <a:srgbClr val="FFFFFF"/>
+                </a:solidFill>
+              </a:rPr>
+              <a:t>FASTER</a:t>
+            </a:r>
+          </a:p>
+          <a:p>
+            <a:pPr algn="ctr">
+              <a:buNone/>
+            </a:pPr>
+            <a:r>
+              <a:rPr sz="1100" b="0">
+                <a:solidFill>
+                  <a:srgbClr val="E2E8F0"/>
+                </a:solidFill>
+              </a:rPr>
+              <a:t>Field Verification
+Cycle Time</a:t>
+            </a:r>
+          </a:p>
+        </p:txBody>
+      </p:sp>
+      <p:sp>
+        <p:nvSpPr>
+          <p:cNvPr id="17412" name="Rounded Rectangle 17411"/>
+          <p:cNvSpPr/>
+          <p:nvPr/>
+        </p:nvSpPr>
+        <p:spPr>
+          <a:xfrm>
+            <a:off x="3200000" y="3200000"/>
+            <a:ext cx="2650000" cy="2400000"/>
+          </a:xfrm>
+          <a:prstGeom prst="roundRect">
+            <a:avLst>
+              <a:gd name="adj" fmla="val 8000"/>
+            </a:avLst>
+          </a:prstGeom>
+          <a:solidFill>
+            <a:srgbClr val="D97706"/>
+          </a:solidFill>
+          <a:ln>
+            <a:noFill/>
+          </a:ln>
+        </p:spPr>
+        <p:style>
+          <a:lnRef idx="1">
+            <a:schemeClr val="accent1"/>
+          </a:lnRef>
+          <a:fillRef idx="3">
+            <a:schemeClr val="accent1"/>
+          </a:fillRef>
+          <a:effectRef idx="2">
+            <a:schemeClr val="accent1"/>
+          </a:effectRef>
+          <a:fontRef idx="minor">
+            <a:schemeClr val="lt1"/>
+          </a:fontRef>
+        </p:style>
+        <p:txBody>
+          <a:bodyPr rtlCol="0" anchor="ctr" wrap="square" lIns="80000" rIns="80000" tIns="150000"/>
+          <a:lstStyle/>
+          <a:p>
+            <a:pPr algn="ctr">
+              <a:spcAft>
+                <a:spcPts val="200"/>
+              </a:spcAft>
+              <a:buNone/>
+            </a:pPr>
+            <a:r>
+              <a:rPr sz="3600" b="1">
+                <a:solidFill>
+                  <a:srgbClr val="FFFFFF"/>
+                </a:solidFill>
+              </a:rPr>
+              <a:t>1,656</a:t>
+            </a:r>
+          </a:p>
+          <a:p>
+            <a:pPr algn="ctr">
+              <a:spcAft>
+                <a:spcPts val="600"/>
+              </a:spcAft>
+              <a:buNone/>
+            </a:pPr>
+            <a:r>
+              <a:rPr sz="1400" b="1">
+                <a:solidFill>
+                  <a:srgbClr val="FFFFFF"/>
+                </a:solidFill>
+              </a:rPr>
+              <a:t>MANDIS</a:t>
+            </a:r>
+          </a:p>
+          <a:p>
+            <a:pPr algn="ctr">
+              <a:buNone/>
+            </a:pPr>
+            <a:r>
+              <a:rPr sz="1100" b="0">
+                <a:solidFill>
+                  <a:srgbClr val="E2E8F0"/>
+                </a:solidFill>
+              </a:rPr>
+              <a:t>Agricultural Markets
+Covered Nationwide</a:t>
+            </a:r>
+          </a:p>
+        </p:txBody>
+      </p:sp>
+      <p:sp>
+        <p:nvSpPr>
+          <p:cNvPr id="17413" name="Rounded Rectangle 17412"/>
+          <p:cNvSpPr/>
+          <p:nvPr/>
+        </p:nvSpPr>
+        <p:spPr>
+          <a:xfrm>
+            <a:off x="6000000" y="3200000"/>
+            <a:ext cx="2650000" cy="2400000"/>
+          </a:xfrm>
+          <a:prstGeom prst="roundRect">
+            <a:avLst>
+              <a:gd name="adj" fmla="val 8000"/>
+            </a:avLst>
+          </a:prstGeom>
+          <a:solidFill>
+            <a:srgbClr val="2563EB"/>
+          </a:solidFill>
+          <a:ln>
+            <a:noFill/>
+          </a:ln>
+        </p:spPr>
+        <p:style>
+          <a:lnRef idx="1">
+            <a:schemeClr val="accent1"/>
+          </a:lnRef>
+          <a:fillRef idx="3">
+            <a:schemeClr val="accent1"/>
+          </a:fillRef>
+          <a:effectRef idx="2">
+            <a:schemeClr val="accent1"/>
+          </a:effectRef>
+          <a:fontRef idx="minor">
+            <a:schemeClr val="lt1"/>
+          </a:fontRef>
+        </p:style>
+        <p:txBody>
+          <a:bodyPr rtlCol="0" anchor="ctr" wrap="square" lIns="80000" rIns="80000" tIns="150000"/>
+          <a:lstStyle/>
+          <a:p>
+            <a:pPr algn="ctr">
+              <a:spcAft>
+                <a:spcPts val="200"/>
+              </a:spcAft>
+              <a:buNone/>
+            </a:pPr>
+            <a:r>
+              <a:rPr sz="3600" b="1">
+                <a:solidFill>
+                  <a:srgbClr val="FFFFFF"/>
+                </a:solidFill>
+              </a:rPr>
+              <a:t>1.80 Cr</a:t>
+            </a:r>
+          </a:p>
+          <a:p>
+            <a:pPr algn="ctr">
+              <a:spcAft>
+                <a:spcPts val="600"/>
+              </a:spcAft>
+              <a:buNone/>
+            </a:pPr>
+            <a:r>
+              <a:rPr sz="1400" b="1">
+                <a:solidFill>
+                  <a:srgbClr val="FFFFFF"/>
+                </a:solidFill>
+              </a:rPr>
+              <a:t>FARMERS</a:t>
+            </a:r>
+          </a:p>
+          <a:p>
+            <a:pPr algn="ctr">
+              <a:buNone/>
+            </a:pPr>
+            <a:r>
+              <a:rPr sz="1100" b="0">
+                <a:solidFill>
+                  <a:srgbClr val="E2E8F0"/>
+                </a:solidFill>
+              </a:rPr>
+              <a:t>Protected from
+Weight Manipulation</a:t>
+            </a:r>
+          </a:p>
+        </p:txBody>
+      </p:sp>
+      <p:sp>
+        <p:nvSpPr>
+          <p:cNvPr id="17414" name="Rounded Rectangle 17413"/>
+          <p:cNvSpPr/>
+          <p:nvPr/>
+        </p:nvSpPr>
+        <p:spPr>
+          <a:xfrm>
+            <a:off x="8800000" y="3200000"/>
+            <a:ext cx="2650000" cy="2400000"/>
+          </a:xfrm>
+          <a:prstGeom prst="roundRect">
+            <a:avLst>
+              <a:gd name="adj" fmla="val 8000"/>
+            </a:avLst>
+          </a:prstGeom>
+          <a:solidFill>
+            <a:srgbClr val="1E3A5F"/>
+          </a:solidFill>
+          <a:ln>
+            <a:noFill/>
+          </a:ln>
+        </p:spPr>
+        <p:style>
+          <a:lnRef idx="1">
+            <a:schemeClr val="accent1"/>
+          </a:lnRef>
+          <a:fillRef idx="3">
+            <a:schemeClr val="accent1"/>
+          </a:fillRef>
+          <a:effectRef idx="2">
+            <a:schemeClr val="accent1"/>
+          </a:effectRef>
+          <a:fontRef idx="minor">
+            <a:schemeClr val="lt1"/>
+          </a:fontRef>
+        </p:style>
+        <p:txBody>
+          <a:bodyPr rtlCol="0" anchor="ctr" wrap="square" lIns="80000" rIns="80000" tIns="150000"/>
+          <a:lstStyle/>
+          <a:p>
+            <a:pPr algn="ctr">
+              <a:spcAft>
+                <a:spcPts val="200"/>
+              </a:spcAft>
+              <a:buNone/>
+            </a:pPr>
+            <a:r>
+              <a:rPr sz="3600" b="1">
+                <a:solidFill>
+                  <a:srgbClr val="FFFFFF"/>
+                </a:solidFill>
+              </a:rPr>
+              <a:t>100%</a:t>
+            </a:r>
+          </a:p>
+          <a:p>
+            <a:pPr algn="ctr">
+              <a:spcAft>
+                <a:spcPts val="600"/>
+              </a:spcAft>
+              <a:buNone/>
+            </a:pPr>
+            <a:r>
+              <a:rPr sz="1400" b="1">
+                <a:solidFill>
+                  <a:srgbClr val="FFFFFF"/>
+                </a:solidFill>
+              </a:rPr>
+              <a:t>TAMPER-PROOF</a:t>
+            </a:r>
+          </a:p>
+          <a:p>
+            <a:pPr algn="ctr">
+              <a:buNone/>
+            </a:pPr>
+            <a:r>
+              <a:rPr sz="1100" b="0">
+                <a:solidFill>
+                  <a:srgbClr val="E2E8F0"/>
+                </a:solidFill>
+              </a:rPr>
+              <a:t>HMAC-SHA256
+Digital Seal Security</a:t>
+            </a:r>
+          </a:p>
+        </p:txBody>
+      </p:sp>
+      <p:sp>
+        <p:nvSpPr>
+          <p:cNvPr id="17415" name="TextBox 17414"/>
+          <p:cNvSpPr txBox="1"/>
+          <p:nvPr/>
+        </p:nvSpPr>
+        <p:spPr>
+          <a:xfrm>
+            <a:off x="400000" y="5700000"/>
+            <a:ext cx="11400000" cy="500000"/>
           </a:xfrm>
           <a:prstGeom prst="rect">
             <a:avLst/>
           </a:prstGeom>
+          <a:noFill/>
         </p:spPr>
-      </p:pic>
+        <p:txBody>
+          <a:bodyPr wrap="square">
+            <a:spAutoFit/>
+          </a:bodyPr>
+          <a:lstStyle/>
+          <a:p>
+            <a:pPr algn="ctr">
+              <a:buNone/>
+            </a:pPr>
+            <a:r>
+              <a:rPr sz="1300" b="1">
+                <a:solidFill>
+                  <a:srgbClr val="1E3A5F"/>
+                </a:solidFill>
+              </a:rPr>
+              <a:t>MANUAL: 2 hours per instrument  ➤➤➤  DIGITAL: Under 15 minutes  |  87.5% efficiency gain</a:t>
+            </a:r>
+          </a:p>
+        </p:txBody>
+      </p:sp>
     </p:spTree>
     <p:extLst>
       <p:ext uri="{BB962C8B-B14F-4D97-AF65-F5344CB8AC3E}">
@@ -8213,12 +10810,12 @@
               <a:t/>
             </a:r>
             <a:r>
-              <a:rPr sz="2400" b="1">
+              <a:rPr sz="2200" b="1">
                 <a:solidFill>
                   <a:srgbClr val="1E3A5F"/>
                 </a:solidFill>
               </a:rPr>
-              <a:t>RESEARCH FOUNDATION &amp; REGULATORY REFERENCES</a:t>
+              <a:t>RESEARCH AND REFERENCES: Standards &amp; Competitive Edge</a:t>
             </a:r>
           </a:p>
         </p:txBody>
@@ -8233,8 +10830,8 @@
         </p:nvSpPr>
         <p:spPr bwMode="auto">
           <a:xfrm>
-            <a:off x="400000" y="1300000"/>
-            <a:ext cx="5500000" cy="4900000"/>
+            <a:off x="400000" y="1200000"/>
+            <a:ext cx="5200000" cy="2400000"/>
           </a:xfrm>
           <a:prstGeom prst="rect">
             <a:avLst/>
@@ -8263,7 +10860,7 @@
               <a:tabLst/>
               <a:defRPr/>
               <a:spcAft>
-                <a:spcPts val="800"/>
+                <a:spcPts val="600"/>
               </a:spcAft>
               <a:buNone/>
             </a:pPr>
@@ -8278,7 +10875,7 @@
               <a:t/>
             </a:r>
             <a:r>
-              <a:rPr sz="1600" b="1">
+              <a:rPr sz="1400" b="1">
                 <a:solidFill>
                   <a:srgbClr val="1E3A5F"/>
                 </a:solidFill>
@@ -8303,7 +10900,7 @@
           <a:p>
             <a:pPr>
               <a:spcAft>
-                <a:spcPts val="600"/>
+                <a:spcPts val="400"/>
               </a:spcAft>
               <a:buNone/>
             </a:pPr>
@@ -8321,13 +10918,13 @@
                   <a:srgbClr val="334155"/>
                 </a:solidFill>
               </a:rPr>
-              <a:t>Non-automatic weighing instruments — Metrological &amp; technical requirements; Table 3 MPE tolerance limits, Section 3.5.</a:t>
+              <a:t>Non-automatic weighing instruments — Metrological &amp; technical requirements; Table 3 MPE limits.</a:t>
             </a:r>
           </a:p>
           <a:p>
             <a:pPr>
               <a:spcAft>
-                <a:spcPts val="600"/>
+                <a:spcPts val="400"/>
               </a:spcAft>
               <a:buNone/>
             </a:pPr>
@@ -8345,13 +10942,13 @@
                   <a:srgbClr val="334155"/>
                 </a:solidFill>
               </a:rPr>
-              <a:t>Non-automatic weighing instruments — Standardized test report format and repeatable testing procedures.</a:t>
+              <a:t>Standardized test report format and repeatable testing procedures.</a:t>
             </a:r>
           </a:p>
           <a:p>
             <a:pPr>
               <a:spcAft>
-                <a:spcPts val="600"/>
+                <a:spcPts val="400"/>
               </a:spcAft>
               <a:buNone/>
             </a:pPr>
@@ -8361,7 +10958,7 @@
                   <a:srgbClr val="0F172A"/>
                 </a:solidFill>
               </a:rPr>
-              <a:t>• ISO/IEC Guide 98-3:2008 (GUM): </a:t>
+              <a:t>• ISO/IEC Guide 98-3 (GUM): </a:t>
             </a:r>
             <a:r>
               <a:rPr b="0" sz="1000">
@@ -8369,13 +10966,13 @@
                   <a:srgbClr val="334155"/>
                 </a:solidFill>
               </a:rPr>
-              <a:t>Guide to the Expression of Uncertainty in Measurement — Expanded uncertainty budget calculation (k=2).</a:t>
+              <a:t>Expanded uncertainty budget calculation (k=2, 95.45% confidence level).</a:t>
             </a:r>
           </a:p>
           <a:p>
             <a:pPr>
               <a:spcAft>
-                <a:spcPts val="600"/>
+                <a:spcPts val="400"/>
               </a:spcAft>
               <a:buNone/>
             </a:pPr>
@@ -8385,7 +10982,7 @@
                   <a:srgbClr val="0F172A"/>
                 </a:solidFill>
               </a:rPr>
-              <a:t>• EURAMET cg-18 v4.0 (2015): </a:t>
+              <a:t>• EURAMET cg-18 v4.0: </a:t>
             </a:r>
             <a:r>
               <a:rPr b="0" sz="1000">
@@ -8393,7 +10990,31 @@
                   <a:srgbClr val="334155"/>
                 </a:solidFill>
               </a:rPr>
-              <a:t>Guidelines on Calibration of NAWI — Repeatability, eccentricity &amp; temperature formulas.</a:t>
+              <a:t>Calibration guidelines — repeatability, eccentricity &amp; temperature formulas.</a:t>
+            </a:r>
+          </a:p>
+          <a:p>
+            <a:pPr>
+              <a:spcAft>
+                <a:spcPts val="400"/>
+              </a:spcAft>
+              <a:buNone/>
+            </a:pPr>
+            <a:r>
+              <a:rPr b="1" sz="1100">
+                <a:solidFill>
+                  <a:srgbClr val="0F172A"/>
+                </a:solidFill>
+              </a:rPr>
+              <a:t>• WELMEC Guide 7.2: </a:t>
+            </a:r>
+            <a:r>
+              <a:rPr b="0" sz="1000">
+                <a:solidFill>
+                  <a:srgbClr val="334155"/>
+                </a:solidFill>
+              </a:rPr>
+              <a:t>Software Guide (Measuring Instruments Directive 2014/32/EU) — Risk Class D compliance.</a:t>
             </a:r>
           </a:p>
         </p:txBody>
@@ -8575,6 +11196,12 @@
           <a:prstGeom prst="ellipse">
             <a:avLst/>
           </a:prstGeom>
+          <a:solidFill>
+            <a:srgbClr val="1E3A5F"/>
+          </a:solidFill>
+          <a:ln>
+            <a:noFill/>
+          </a:ln>
         </p:spPr>
         <p:style>
           <a:lnRef idx="2">
@@ -8591,7 +11218,7 @@
           </a:fontRef>
         </p:style>
         <p:txBody>
-          <a:bodyPr rtlCol="0" anchor="ctr"/>
+          <a:bodyPr rtlCol="0" anchor="ctr" wrap="square"/>
           <a:lstStyle/>
           <a:p>
             <a:pPr algn="ctr">
@@ -8604,7 +11231,7 @@
             <a:r>
               <a:rPr sz="1000" b="1">
                 <a:solidFill>
-                  <a:srgbClr val="1E3A5F"/>
+                  <a:srgbClr val="FFFFFF"/>
                 </a:solidFill>
               </a:rPr>
               <a:t>Metrology
@@ -8652,8 +11279,8 @@
         </p:nvSpPr>
         <p:spPr>
           <a:xfrm>
-            <a:off x="6100000" y="1300000"/>
-            <a:ext cx="5600000" cy="4900000"/>
+            <a:off x="5800000" y="1200000"/>
+            <a:ext cx="5900000" cy="2400000"/>
           </a:xfrm>
           <a:prstGeom prst="rect">
             <a:avLst/>
@@ -8668,12 +11295,12 @@
           <a:p>
             <a:pPr>
               <a:spcAft>
-                <a:spcPts val="800"/>
+                <a:spcPts val="600"/>
               </a:spcAft>
               <a:buNone/>
             </a:pPr>
             <a:r>
-              <a:rPr sz="1600" b="1">
+              <a:rPr sz="1400" b="1">
                 <a:solidFill>
                   <a:srgbClr val="1E3A5F"/>
                 </a:solidFill>
@@ -8684,20 +11311,20 @@
           <a:p>
             <a:pPr>
               <a:spcAft>
-                <a:spcPts val="400"/>
+                <a:spcPts val="300"/>
               </a:spcAft>
               <a:buNone/>
             </a:pPr>
             <a:r>
-              <a:rPr b="1" sz="1050">
+              <a:rPr b="1" sz="1100">
                 <a:solidFill>
                   <a:srgbClr val="0F172A"/>
                 </a:solidFill>
               </a:rPr>
-              <a:t>• Legal Metrology Act, 2009 (Act 1 of 2010): </a:t>
-            </a:r>
-            <a:r>
-              <a:rPr b="0" sz="950">
+              <a:t>• Legal Metrology Act, 2009: </a:t>
+            </a:r>
+            <a:r>
+              <a:rPr b="0" sz="1000">
                 <a:solidFill>
                   <a:srgbClr val="334155"/>
                 </a:solidFill>
@@ -8708,36 +11335,36 @@
           <a:p>
             <a:pPr>
               <a:spcAft>
-                <a:spcPts val="400"/>
+                <a:spcPts val="300"/>
               </a:spcAft>
               <a:buNone/>
             </a:pPr>
             <a:r>
-              <a:rPr b="1" sz="1050">
+              <a:rPr b="1" sz="1100">
                 <a:solidFill>
                   <a:srgbClr val="0F172A"/>
                 </a:solidFill>
               </a:rPr>
-              <a:t>• Legal Metrology (General) Rules, 2011: </a:t>
-            </a:r>
-            <a:r>
-              <a:rPr b="0" sz="950">
+              <a:t>• Legal Metrology Rules, 2011: </a:t>
+            </a:r>
+            <a:r>
+              <a:rPr b="0" sz="1000">
                 <a:solidFill>
                   <a:srgbClr val="334155"/>
                 </a:solidFill>
               </a:rPr>
-              <a:t>Seventh Schedule standards, including July 2026 amendments rationalizing verification norms for high-capacity scales (&gt;=1 tonne).</a:t>
+              <a:t>Seventh Schedule standards, incl. July 2026 amendments for high-capacity scales (≥1 tonne).</a:t>
             </a:r>
           </a:p>
           <a:p>
             <a:pPr>
               <a:spcAft>
-                <a:spcPts val="400"/>
+                <a:spcPts val="300"/>
               </a:spcAft>
               <a:buNone/>
             </a:pPr>
             <a:r>
-              <a:rPr b="1" sz="1050">
+              <a:rPr b="1" sz="1100">
                 <a:solidFill>
                   <a:srgbClr val="0F172A"/>
                 </a:solidFill>
@@ -8745,31 +11372,31 @@
               <a:t>• BIS IS 9281 (Parts 1-4): </a:t>
             </a:r>
             <a:r>
-              <a:rPr b="0" sz="950">
+              <a:rPr b="0" sz="1000">
                 <a:solidFill>
                   <a:srgbClr val="334155"/>
                 </a:solidFill>
               </a:rPr>
-              <a:t>Bureau of Indian Standards specifications for electronic weighing systems and load cells.</a:t>
+              <a:t>Bureau of Indian Standards specs for electronic weighing systems and load cells.</a:t>
             </a:r>
           </a:p>
           <a:p>
             <a:pPr>
               <a:spcAft>
-                <a:spcPts val="400"/>
+                <a:spcPts val="300"/>
               </a:spcAft>
               <a:buNone/>
             </a:pPr>
             <a:r>
-              <a:rPr b="1" sz="1050">
+              <a:rPr b="1" sz="1100">
                 <a:solidFill>
                   <a:srgbClr val="0F172A"/>
                 </a:solidFill>
               </a:rPr>
-              <a:t>• DoCA eMaap Portal (emaap.gov.in): </a:t>
-            </a:r>
-            <a:r>
-              <a:rPr b="0" sz="950">
+              <a:t>• DoCA eMaap Portal: </a:t>
+            </a:r>
+            <a:r>
+              <a:rPr b="0" sz="1000">
                 <a:solidFill>
                   <a:srgbClr val="334155"/>
                 </a:solidFill>
@@ -8780,53 +11407,936 @@
           <a:p>
             <a:pPr>
               <a:spcAft>
-                <a:spcPts val="400"/>
+                <a:spcPts val="300"/>
               </a:spcAft>
               <a:buNone/>
             </a:pPr>
             <a:r>
-              <a:rPr b="1" sz="1050">
+              <a:rPr b="1" sz="1100">
                 <a:solidFill>
                   <a:srgbClr val="0F172A"/>
                 </a:solidFill>
               </a:rPr>
-              <a:t>• e-NAM Platform (enam.gov.in): </a:t>
-            </a:r>
-            <a:r>
-              <a:rPr b="0" sz="950">
+              <a:t>• e-NAM Platform: </a:t>
+            </a:r>
+            <a:r>
+              <a:rPr b="0" sz="1000">
                 <a:solidFill>
                   <a:srgbClr val="334155"/>
                 </a:solidFill>
               </a:rPr>
-              <a:t>National Agriculture Market official data: 1,656 mandis, 1.80 Cr farmers (June 2026).</a:t>
+              <a:t>National Agriculture Market: 1,656 mandis, 1.80 Cr farmers (June 2026 official data).</a:t>
             </a:r>
           </a:p>
           <a:p>
             <a:pPr>
               <a:spcAft>
-                <a:spcPts val="400"/>
+                <a:spcPts val="300"/>
               </a:spcAft>
               <a:buNone/>
             </a:pPr>
             <a:r>
-              <a:rPr b="1" sz="1050">
+              <a:rPr b="1" sz="1100">
                 <a:solidFill>
                   <a:srgbClr val="0F172A"/>
                 </a:solidFill>
               </a:rPr>
-              <a:t>• SIH Winner Benchmark: </a:t>
-            </a:r>
-            <a:r>
-              <a:rPr b="0" sz="950">
+              <a:t>• CSIR-NPL: </a:t>
+            </a:r>
+            <a:r>
+              <a:rPr b="0" sz="1000">
                 <a:solidFill>
                   <a:srgbClr val="334155"/>
                 </a:solidFill>
               </a:rPr>
-              <a:t>https://github.com/Aadiii00/SIH-Winners-PPt-and-Sources.</a:t>
-            </a:r>
-          </a:p>
-        </p:txBody>
-      </p:sp>
+              <a:t>National Physical Laboratory — apex metrological standards &amp; calibration traceability.</a:t>
+            </a:r>
+          </a:p>
+        </p:txBody>
+      </p:sp>
+      <p:graphicFrame>
+        <p:nvGraphicFramePr>
+          <p:cNvPr id="17412" name="Table 17411"/>
+          <p:cNvGraphicFramePr>
+            <a:graphicFrameLocks noGrp="1"/>
+          </p:cNvGraphicFramePr>
+          <p:nvPr/>
+        </p:nvGraphicFramePr>
+        <p:xfrm>
+          <a:off x="400000" y="3800000"/>
+          <a:ext cx="11400000" cy="2400000"/>
+        </p:xfrm>
+        <a:graphic>
+          <a:graphicData uri="http://schemas.openxmlformats.org/drawingml/2006/table">
+            <a:tbl>
+              <a:tblPr firstRow="1" bandRow="1">
+                <a:tableStyleId>{5C22544A-7EE6-4342-B048-85BDC9FD1C3A}</a:tableStyleId>
+              </a:tblPr>
+              <a:tblGrid>
+                <a:gridCol w="2800000"/>
+                <a:gridCol w="2200000"/>
+                <a:gridCol w="2000000"/>
+                <a:gridCol w="2200000"/>
+                <a:gridCol w="2200000"/>
+              </a:tblGrid>
+              <a:tr h="342857">
+                <a:tc>
+                  <a:txBody>
+                    <a:bodyPr wrap="square" lIns="50000" rIns="50000" tIns="30000" bIns="30000"/>
+                    <a:lstStyle/>
+                    <a:p>
+                      <a:pPr algn="ctr">
+                        <a:buNone/>
+                      </a:pPr>
+                      <a:r>
+                        <a:rPr sz="1050" b="1">
+                          <a:solidFill>
+                            <a:srgbClr val="FFFFFF"/>
+                          </a:solidFill>
+                        </a:rPr>
+                        <a:t>Feature / Metric</a:t>
+                      </a:r>
+                    </a:p>
+                  </a:txBody>
+                  <a:tcPr>
+                    <a:solidFill>
+                      <a:srgbClr val="1E3A5F"/>
+                    </a:solidFill>
+                  </a:tcPr>
+                </a:tc>
+                <a:tc>
+                  <a:txBody>
+                    <a:bodyPr wrap="square" lIns="50000" rIns="50000" tIns="30000" bIns="30000"/>
+                    <a:lstStyle/>
+                    <a:p>
+                      <a:pPr algn="ctr">
+                        <a:buNone/>
+                      </a:pPr>
+                      <a:r>
+                        <a:rPr sz="1050" b="1">
+                          <a:solidFill>
+                            <a:srgbClr val="FFFFFF"/>
+                          </a:solidFill>
+                        </a:rPr>
+                        <a:t>NAWI-ReportPro</a:t>
+                      </a:r>
+                    </a:p>
+                  </a:txBody>
+                  <a:tcPr>
+                    <a:solidFill>
+                      <a:srgbClr val="16A34A"/>
+                    </a:solidFill>
+                  </a:tcPr>
+                </a:tc>
+                <a:tc>
+                  <a:txBody>
+                    <a:bodyPr wrap="square" lIns="50000" rIns="50000" tIns="30000" bIns="30000"/>
+                    <a:lstStyle/>
+                    <a:p>
+                      <a:pPr algn="ctr">
+                        <a:buNone/>
+                      </a:pPr>
+                      <a:r>
+                        <a:rPr sz="1050" b="1">
+                          <a:solidFill>
+                            <a:srgbClr val="FFFFFF"/>
+                          </a:solidFill>
+                        </a:rPr>
+                        <a:t>Manual Paper</a:t>
+                      </a:r>
+                    </a:p>
+                  </a:txBody>
+                  <a:tcPr>
+                    <a:solidFill>
+                      <a:srgbClr val="6B7280"/>
+                    </a:solidFill>
+                  </a:tcPr>
+                </a:tc>
+                <a:tc>
+                  <a:txBody>
+                    <a:bodyPr wrap="square" lIns="50000" rIns="50000" tIns="30000" bIns="30000"/>
+                    <a:lstStyle/>
+                    <a:p>
+                      <a:pPr algn="ctr">
+                        <a:buNone/>
+                      </a:pPr>
+                      <a:r>
+                        <a:rPr sz="1050" b="1">
+                          <a:solidFill>
+                            <a:srgbClr val="FFFFFF"/>
+                          </a:solidFill>
+                        </a:rPr>
+                        <a:t>DoCA eMaap</a:t>
+                      </a:r>
+                    </a:p>
+                  </a:txBody>
+                  <a:tcPr>
+                    <a:solidFill>
+                      <a:srgbClr val="2563EB"/>
+                    </a:solidFill>
+                  </a:tcPr>
+                </a:tc>
+                <a:tc>
+                  <a:txBody>
+                    <a:bodyPr wrap="square" lIns="50000" rIns="50000" tIns="30000" bIns="30000"/>
+                    <a:lstStyle/>
+                    <a:p>
+                      <a:pPr algn="ctr">
+                        <a:buNone/>
+                      </a:pPr>
+                      <a:r>
+                        <a:rPr sz="1050" b="1">
+                          <a:solidFill>
+                            <a:srgbClr val="FFFFFF"/>
+                          </a:solidFill>
+                        </a:rPr>
+                        <a:t>Proprietary SCADA</a:t>
+                      </a:r>
+                    </a:p>
+                  </a:txBody>
+                  <a:tcPr>
+                    <a:solidFill>
+                      <a:srgbClr val="6B7280"/>
+                    </a:solidFill>
+                  </a:tcPr>
+                </a:tc>
+              </a:tr>
+              <a:tr h="342857">
+                <a:tc>
+                  <a:txBody>
+                    <a:bodyPr wrap="square" lIns="50000" rIns="50000" tIns="30000" bIns="30000"/>
+                    <a:lstStyle/>
+                    <a:p>
+                      <a:pPr algn="l">
+                        <a:buNone/>
+                      </a:pPr>
+                      <a:r>
+                        <a:rPr sz="1000" b="1">
+                          <a:solidFill>
+                            <a:srgbClr val="0F172A"/>
+                          </a:solidFill>
+                        </a:rPr>
+                        <a:t>Direct RS-232 Telemetry</a:t>
+                      </a:r>
+                    </a:p>
+                  </a:txBody>
+                  <a:tcPr>
+                    <a:solidFill>
+                      <a:srgbClr val="F1F5F9"/>
+                    </a:solidFill>
+                  </a:tcPr>
+                </a:tc>
+                <a:tc>
+                  <a:txBody>
+                    <a:bodyPr wrap="square" lIns="50000" rIns="50000" tIns="30000" bIns="30000"/>
+                    <a:lstStyle/>
+                    <a:p>
+                      <a:pPr algn="ctr">
+                        <a:buNone/>
+                      </a:pPr>
+                      <a:r>
+                        <a:rPr sz="1000" b="0">
+                          <a:solidFill>
+                            <a:srgbClr val="0F172A"/>
+                          </a:solidFill>
+                        </a:rPr>
+                        <a:t>✅ Zero typing</a:t>
+                      </a:r>
+                    </a:p>
+                  </a:txBody>
+                  <a:tcPr>
+                    <a:solidFill>
+                      <a:srgbClr val="F1F5F9"/>
+                    </a:solidFill>
+                  </a:tcPr>
+                </a:tc>
+                <a:tc>
+                  <a:txBody>
+                    <a:bodyPr wrap="square" lIns="50000" rIns="50000" tIns="30000" bIns="30000"/>
+                    <a:lstStyle/>
+                    <a:p>
+                      <a:pPr algn="ctr">
+                        <a:buNone/>
+                      </a:pPr>
+                      <a:r>
+                        <a:rPr sz="1000" b="0">
+                          <a:solidFill>
+                            <a:srgbClr val="0F172A"/>
+                          </a:solidFill>
+                        </a:rPr>
+                        <a:t>❌ Manual entry</a:t>
+                      </a:r>
+                    </a:p>
+                  </a:txBody>
+                  <a:tcPr>
+                    <a:solidFill>
+                      <a:srgbClr val="F1F5F9"/>
+                    </a:solidFill>
+                  </a:tcPr>
+                </a:tc>
+                <a:tc>
+                  <a:txBody>
+                    <a:bodyPr wrap="square" lIns="50000" rIns="50000" tIns="30000" bIns="30000"/>
+                    <a:lstStyle/>
+                    <a:p>
+                      <a:pPr algn="ctr">
+                        <a:buNone/>
+                      </a:pPr>
+                      <a:r>
+                        <a:rPr sz="1000" b="0">
+                          <a:solidFill>
+                            <a:srgbClr val="0F172A"/>
+                          </a:solidFill>
+                        </a:rPr>
+                        <a:t>❌ Manual form</a:t>
+                      </a:r>
+                    </a:p>
+                  </a:txBody>
+                  <a:tcPr>
+                    <a:solidFill>
+                      <a:srgbClr val="F1F5F9"/>
+                    </a:solidFill>
+                  </a:tcPr>
+                </a:tc>
+                <a:tc>
+                  <a:txBody>
+                    <a:bodyPr wrap="square" lIns="50000" rIns="50000" tIns="30000" bIns="30000"/>
+                    <a:lstStyle/>
+                    <a:p>
+                      <a:pPr algn="ctr">
+                        <a:buNone/>
+                      </a:pPr>
+                      <a:r>
+                        <a:rPr sz="1000" b="0">
+                          <a:solidFill>
+                            <a:srgbClr val="0F172A"/>
+                          </a:solidFill>
+                        </a:rPr>
+                        <a:t>✅ Vendor-locked</a:t>
+                      </a:r>
+                    </a:p>
+                  </a:txBody>
+                  <a:tcPr>
+                    <a:solidFill>
+                      <a:srgbClr val="F1F5F9"/>
+                    </a:solidFill>
+                  </a:tcPr>
+                </a:tc>
+              </a:tr>
+              <a:tr h="342857">
+                <a:tc>
+                  <a:txBody>
+                    <a:bodyPr wrap="square" lIns="50000" rIns="50000" tIns="30000" bIns="30000"/>
+                    <a:lstStyle/>
+                    <a:p>
+                      <a:pPr algn="l">
+                        <a:buNone/>
+                      </a:pPr>
+                      <a:r>
+                        <a:rPr sz="1000" b="1">
+                          <a:solidFill>
+                            <a:srgbClr val="0F172A"/>
+                          </a:solidFill>
+                        </a:rPr>
+                        <a:t>OIML R-76 MPE Engine</a:t>
+                      </a:r>
+                    </a:p>
+                  </a:txBody>
+                  <a:tcPr>
+                    <a:solidFill>
+                      <a:srgbClr val="FFFFFF"/>
+                    </a:solidFill>
+                  </a:tcPr>
+                </a:tc>
+                <a:tc>
+                  <a:txBody>
+                    <a:bodyPr wrap="square" lIns="50000" rIns="50000" tIns="30000" bIns="30000"/>
+                    <a:lstStyle/>
+                    <a:p>
+                      <a:pPr algn="ctr">
+                        <a:buNone/>
+                      </a:pPr>
+                      <a:r>
+                        <a:rPr sz="1000" b="0">
+                          <a:solidFill>
+                            <a:srgbClr val="0F172A"/>
+                          </a:solidFill>
+                        </a:rPr>
+                        <a:t>✅ Instant (all classes)</a:t>
+                      </a:r>
+                    </a:p>
+                  </a:txBody>
+                  <a:tcPr>
+                    <a:solidFill>
+                      <a:srgbClr val="FFFFFF"/>
+                    </a:solidFill>
+                  </a:tcPr>
+                </a:tc>
+                <a:tc>
+                  <a:txBody>
+                    <a:bodyPr wrap="square" lIns="50000" rIns="50000" tIns="30000" bIns="30000"/>
+                    <a:lstStyle/>
+                    <a:p>
+                      <a:pPr algn="ctr">
+                        <a:buNone/>
+                      </a:pPr>
+                      <a:r>
+                        <a:rPr sz="1000" b="0">
+                          <a:solidFill>
+                            <a:srgbClr val="0F172A"/>
+                          </a:solidFill>
+                        </a:rPr>
+                        <a:t>❌ Manual calc</a:t>
+                      </a:r>
+                    </a:p>
+                  </a:txBody>
+                  <a:tcPr>
+                    <a:solidFill>
+                      <a:srgbClr val="FFFFFF"/>
+                    </a:solidFill>
+                  </a:tcPr>
+                </a:tc>
+                <a:tc>
+                  <a:txBody>
+                    <a:bodyPr wrap="square" lIns="50000" rIns="50000" tIns="30000" bIns="30000"/>
+                    <a:lstStyle/>
+                    <a:p>
+                      <a:pPr algn="ctr">
+                        <a:buNone/>
+                      </a:pPr>
+                      <a:r>
+                        <a:rPr sz="1000" b="0">
+                          <a:solidFill>
+                            <a:srgbClr val="0F172A"/>
+                          </a:solidFill>
+                        </a:rPr>
+                        <a:t>❌ No validation</a:t>
+                      </a:r>
+                    </a:p>
+                  </a:txBody>
+                  <a:tcPr>
+                    <a:solidFill>
+                      <a:srgbClr val="FFFFFF"/>
+                    </a:solidFill>
+                  </a:tcPr>
+                </a:tc>
+                <a:tc>
+                  <a:txBody>
+                    <a:bodyPr wrap="square" lIns="50000" rIns="50000" tIns="30000" bIns="30000"/>
+                    <a:lstStyle/>
+                    <a:p>
+                      <a:pPr algn="ctr">
+                        <a:buNone/>
+                      </a:pPr>
+                      <a:r>
+                        <a:rPr sz="1000" b="0">
+                          <a:solidFill>
+                            <a:srgbClr val="0F172A"/>
+                          </a:solidFill>
+                        </a:rPr>
+                        <a:t>⚠️ Basic tolerance</a:t>
+                      </a:r>
+                    </a:p>
+                  </a:txBody>
+                  <a:tcPr>
+                    <a:solidFill>
+                      <a:srgbClr val="FFFFFF"/>
+                    </a:solidFill>
+                  </a:tcPr>
+                </a:tc>
+              </a:tr>
+              <a:tr h="342857">
+                <a:tc>
+                  <a:txBody>
+                    <a:bodyPr wrap="square" lIns="50000" rIns="50000" tIns="30000" bIns="30000"/>
+                    <a:lstStyle/>
+                    <a:p>
+                      <a:pPr algn="l">
+                        <a:buNone/>
+                      </a:pPr>
+                      <a:r>
+                        <a:rPr sz="1000" b="1">
+                          <a:solidFill>
+                            <a:srgbClr val="0F172A"/>
+                          </a:solidFill>
+                        </a:rPr>
+                        <a:t>Offline PWA (Remote Mandis)</a:t>
+                      </a:r>
+                    </a:p>
+                  </a:txBody>
+                  <a:tcPr>
+                    <a:solidFill>
+                      <a:srgbClr val="F1F5F9"/>
+                    </a:solidFill>
+                  </a:tcPr>
+                </a:tc>
+                <a:tc>
+                  <a:txBody>
+                    <a:bodyPr wrap="square" lIns="50000" rIns="50000" tIns="30000" bIns="30000"/>
+                    <a:lstStyle/>
+                    <a:p>
+                      <a:pPr algn="ctr">
+                        <a:buNone/>
+                      </a:pPr>
+                      <a:r>
+                        <a:rPr sz="1000" b="0">
+                          <a:solidFill>
+                            <a:srgbClr val="0F172A"/>
+                          </a:solidFill>
+                        </a:rPr>
+                        <a:t>✅ IndexedDB + sync</a:t>
+                      </a:r>
+                    </a:p>
+                  </a:txBody>
+                  <a:tcPr>
+                    <a:solidFill>
+                      <a:srgbClr val="F1F5F9"/>
+                    </a:solidFill>
+                  </a:tcPr>
+                </a:tc>
+                <a:tc>
+                  <a:txBody>
+                    <a:bodyPr wrap="square" lIns="50000" rIns="50000" tIns="30000" bIns="30000"/>
+                    <a:lstStyle/>
+                    <a:p>
+                      <a:pPr algn="ctr">
+                        <a:buNone/>
+                      </a:pPr>
+                      <a:r>
+                        <a:rPr sz="1000" b="0">
+                          <a:solidFill>
+                            <a:srgbClr val="0F172A"/>
+                          </a:solidFill>
+                        </a:rPr>
+                        <a:t>✅ Paper-based</a:t>
+                      </a:r>
+                    </a:p>
+                  </a:txBody>
+                  <a:tcPr>
+                    <a:solidFill>
+                      <a:srgbClr val="F1F5F9"/>
+                    </a:solidFill>
+                  </a:tcPr>
+                </a:tc>
+                <a:tc>
+                  <a:txBody>
+                    <a:bodyPr wrap="square" lIns="50000" rIns="50000" tIns="30000" bIns="30000"/>
+                    <a:lstStyle/>
+                    <a:p>
+                      <a:pPr algn="ctr">
+                        <a:buNone/>
+                      </a:pPr>
+                      <a:r>
+                        <a:rPr sz="1000" b="0">
+                          <a:solidFill>
+                            <a:srgbClr val="0F172A"/>
+                          </a:solidFill>
+                        </a:rPr>
+                        <a:t>❌ Needs internet</a:t>
+                      </a:r>
+                    </a:p>
+                  </a:txBody>
+                  <a:tcPr>
+                    <a:solidFill>
+                      <a:srgbClr val="F1F5F9"/>
+                    </a:solidFill>
+                  </a:tcPr>
+                </a:tc>
+                <a:tc>
+                  <a:txBody>
+                    <a:bodyPr wrap="square" lIns="50000" rIns="50000" tIns="30000" bIns="30000"/>
+                    <a:lstStyle/>
+                    <a:p>
+                      <a:pPr algn="ctr">
+                        <a:buNone/>
+                      </a:pPr>
+                      <a:r>
+                        <a:rPr sz="1000" b="0">
+                          <a:solidFill>
+                            <a:srgbClr val="0F172A"/>
+                          </a:solidFill>
+                        </a:rPr>
+                        <a:t>❌ On-prem server</a:t>
+                      </a:r>
+                    </a:p>
+                  </a:txBody>
+                  <a:tcPr>
+                    <a:solidFill>
+                      <a:srgbClr val="F1F5F9"/>
+                    </a:solidFill>
+                  </a:tcPr>
+                </a:tc>
+              </a:tr>
+              <a:tr h="342857">
+                <a:tc>
+                  <a:txBody>
+                    <a:bodyPr wrap="square" lIns="50000" rIns="50000" tIns="30000" bIns="30000"/>
+                    <a:lstStyle/>
+                    <a:p>
+                      <a:pPr algn="l">
+                        <a:buNone/>
+                      </a:pPr>
+                      <a:r>
+                        <a:rPr sz="1000" b="1">
+                          <a:solidFill>
+                            <a:srgbClr val="0F172A"/>
+                          </a:solidFill>
+                        </a:rPr>
+                        <a:t>Tamper-Proof Certificates</a:t>
+                      </a:r>
+                    </a:p>
+                  </a:txBody>
+                  <a:tcPr>
+                    <a:solidFill>
+                      <a:srgbClr val="FFFFFF"/>
+                    </a:solidFill>
+                  </a:tcPr>
+                </a:tc>
+                <a:tc>
+                  <a:txBody>
+                    <a:bodyPr wrap="square" lIns="50000" rIns="50000" tIns="30000" bIns="30000"/>
+                    <a:lstStyle/>
+                    <a:p>
+                      <a:pPr algn="ctr">
+                        <a:buNone/>
+                      </a:pPr>
+                      <a:r>
+                        <a:rPr sz="1000" b="0">
+                          <a:solidFill>
+                            <a:srgbClr val="0F172A"/>
+                          </a:solidFill>
+                        </a:rPr>
+                        <a:t>✅ HMAC-SHA256 + QR</a:t>
+                      </a:r>
+                    </a:p>
+                  </a:txBody>
+                  <a:tcPr>
+                    <a:solidFill>
+                      <a:srgbClr val="FFFFFF"/>
+                    </a:solidFill>
+                  </a:tcPr>
+                </a:tc>
+                <a:tc>
+                  <a:txBody>
+                    <a:bodyPr wrap="square" lIns="50000" rIns="50000" tIns="30000" bIns="30000"/>
+                    <a:lstStyle/>
+                    <a:p>
+                      <a:pPr algn="ctr">
+                        <a:buNone/>
+                      </a:pPr>
+                      <a:r>
+                        <a:rPr sz="1000" b="0">
+                          <a:solidFill>
+                            <a:srgbClr val="0F172A"/>
+                          </a:solidFill>
+                        </a:rPr>
+                        <a:t>❌ Forgeable stamps</a:t>
+                      </a:r>
+                    </a:p>
+                  </a:txBody>
+                  <a:tcPr>
+                    <a:solidFill>
+                      <a:srgbClr val="FFFFFF"/>
+                    </a:solidFill>
+                  </a:tcPr>
+                </a:tc>
+                <a:tc>
+                  <a:txBody>
+                    <a:bodyPr wrap="square" lIns="50000" rIns="50000" tIns="30000" bIns="30000"/>
+                    <a:lstStyle/>
+                    <a:p>
+                      <a:pPr algn="ctr">
+                        <a:buNone/>
+                      </a:pPr>
+                      <a:r>
+                        <a:rPr sz="1000" b="0">
+                          <a:solidFill>
+                            <a:srgbClr val="0F172A"/>
+                          </a:solidFill>
+                        </a:rPr>
+                        <a:t>⚠️ Basic DB entry</a:t>
+                      </a:r>
+                    </a:p>
+                  </a:txBody>
+                  <a:tcPr>
+                    <a:solidFill>
+                      <a:srgbClr val="FFFFFF"/>
+                    </a:solidFill>
+                  </a:tcPr>
+                </a:tc>
+                <a:tc>
+                  <a:txBody>
+                    <a:bodyPr wrap="square" lIns="50000" rIns="50000" tIns="30000" bIns="30000"/>
+                    <a:lstStyle/>
+                    <a:p>
+                      <a:pPr algn="ctr">
+                        <a:buNone/>
+                      </a:pPr>
+                      <a:r>
+                        <a:rPr sz="1000" b="0">
+                          <a:solidFill>
+                            <a:srgbClr val="0F172A"/>
+                          </a:solidFill>
+                        </a:rPr>
+                        <a:t>❌ Proprietary logs</a:t>
+                      </a:r>
+                    </a:p>
+                  </a:txBody>
+                  <a:tcPr>
+                    <a:solidFill>
+                      <a:srgbClr val="FFFFFF"/>
+                    </a:solidFill>
+                  </a:tcPr>
+                </a:tc>
+              </a:tr>
+              <a:tr h="342857">
+                <a:tc>
+                  <a:txBody>
+                    <a:bodyPr wrap="square" lIns="50000" rIns="50000" tIns="30000" bIns="30000"/>
+                    <a:lstStyle/>
+                    <a:p>
+                      <a:pPr algn="l">
+                        <a:buNone/>
+                      </a:pPr>
+                      <a:r>
+                        <a:rPr sz="1000" b="1">
+                          <a:solidFill>
+                            <a:srgbClr val="0F172A"/>
+                          </a:solidFill>
+                        </a:rPr>
+                        <a:t>Hardware Independence</a:t>
+                      </a:r>
+                    </a:p>
+                  </a:txBody>
+                  <a:tcPr>
+                    <a:solidFill>
+                      <a:srgbClr val="F1F5F9"/>
+                    </a:solidFill>
+                  </a:tcPr>
+                </a:tc>
+                <a:tc>
+                  <a:txBody>
+                    <a:bodyPr wrap="square" lIns="50000" rIns="50000" tIns="30000" bIns="30000"/>
+                    <a:lstStyle/>
+                    <a:p>
+                      <a:pPr algn="ctr">
+                        <a:buNone/>
+                      </a:pPr>
+                      <a:r>
+                        <a:rPr sz="1000" b="0">
+                          <a:solidFill>
+                            <a:srgbClr val="0F172A"/>
+                          </a:solidFill>
+                        </a:rPr>
+                        <a:t>✅ Any scale vendor</a:t>
+                      </a:r>
+                    </a:p>
+                  </a:txBody>
+                  <a:tcPr>
+                    <a:solidFill>
+                      <a:srgbClr val="F1F5F9"/>
+                    </a:solidFill>
+                  </a:tcPr>
+                </a:tc>
+                <a:tc>
+                  <a:txBody>
+                    <a:bodyPr wrap="square" lIns="50000" rIns="50000" tIns="30000" bIns="30000"/>
+                    <a:lstStyle/>
+                    <a:p>
+                      <a:pPr algn="ctr">
+                        <a:buNone/>
+                      </a:pPr>
+                      <a:r>
+                        <a:rPr sz="1000" b="0">
+                          <a:solidFill>
+                            <a:srgbClr val="0F172A"/>
+                          </a:solidFill>
+                        </a:rPr>
+                        <a:t>N/A</a:t>
+                      </a:r>
+                    </a:p>
+                  </a:txBody>
+                  <a:tcPr>
+                    <a:solidFill>
+                      <a:srgbClr val="F1F5F9"/>
+                    </a:solidFill>
+                  </a:tcPr>
+                </a:tc>
+                <a:tc>
+                  <a:txBody>
+                    <a:bodyPr wrap="square" lIns="50000" rIns="50000" tIns="30000" bIns="30000"/>
+                    <a:lstStyle/>
+                    <a:p>
+                      <a:pPr algn="ctr">
+                        <a:buNone/>
+                      </a:pPr>
+                      <a:r>
+                        <a:rPr sz="1000" b="0">
+                          <a:solidFill>
+                            <a:srgbClr val="0F172A"/>
+                          </a:solidFill>
+                        </a:rPr>
+                        <a:t>N/A</a:t>
+                      </a:r>
+                    </a:p>
+                  </a:txBody>
+                  <a:tcPr>
+                    <a:solidFill>
+                      <a:srgbClr val="F1F5F9"/>
+                    </a:solidFill>
+                  </a:tcPr>
+                </a:tc>
+                <a:tc>
+                  <a:txBody>
+                    <a:bodyPr wrap="square" lIns="50000" rIns="50000" tIns="30000" bIns="30000"/>
+                    <a:lstStyle/>
+                    <a:p>
+                      <a:pPr algn="ctr">
+                        <a:buNone/>
+                      </a:pPr>
+                      <a:r>
+                        <a:rPr sz="1000" b="0">
+                          <a:solidFill>
+                            <a:srgbClr val="0F172A"/>
+                          </a:solidFill>
+                        </a:rPr>
+                        <a:t>❌ OEM only</a:t>
+                      </a:r>
+                    </a:p>
+                  </a:txBody>
+                  <a:tcPr>
+                    <a:solidFill>
+                      <a:srgbClr val="F1F5F9"/>
+                    </a:solidFill>
+                  </a:tcPr>
+                </a:tc>
+              </a:tr>
+              <a:tr h="342858">
+                <a:tc>
+                  <a:txBody>
+                    <a:bodyPr wrap="square" lIns="50000" rIns="50000" tIns="30000" bIns="30000"/>
+                    <a:lstStyle/>
+                    <a:p>
+                      <a:pPr algn="l">
+                        <a:buNone/>
+                      </a:pPr>
+                      <a:r>
+                        <a:rPr sz="1000" b="1">
+                          <a:solidFill>
+                            <a:srgbClr val="0F172A"/>
+                          </a:solidFill>
+                        </a:rPr>
+                        <a:t>Total Software Cost</a:t>
+                      </a:r>
+                    </a:p>
+                  </a:txBody>
+                  <a:tcPr>
+                    <a:solidFill>
+                      <a:srgbClr val="FFFFFF"/>
+                    </a:solidFill>
+                  </a:tcPr>
+                </a:tc>
+                <a:tc>
+                  <a:txBody>
+                    <a:bodyPr wrap="square" lIns="50000" rIns="50000" tIns="30000" bIns="30000"/>
+                    <a:lstStyle/>
+                    <a:p>
+                      <a:pPr algn="ctr">
+                        <a:buNone/>
+                      </a:pPr>
+                      <a:r>
+                        <a:rPr sz="1000" b="0">
+                          <a:solidFill>
+                            <a:srgbClr val="0F172A"/>
+                          </a:solidFill>
+                        </a:rPr>
+                        <a:t>₹0 (FOSS Stack)</a:t>
+                      </a:r>
+                    </a:p>
+                  </a:txBody>
+                  <a:tcPr>
+                    <a:solidFill>
+                      <a:srgbClr val="FFFFFF"/>
+                    </a:solidFill>
+                  </a:tcPr>
+                </a:tc>
+                <a:tc>
+                  <a:txBody>
+                    <a:bodyPr wrap="square" lIns="50000" rIns="50000" tIns="30000" bIns="30000"/>
+                    <a:lstStyle/>
+                    <a:p>
+                      <a:pPr algn="ctr">
+                        <a:buNone/>
+                      </a:pPr>
+                      <a:r>
+                        <a:rPr sz="1000" b="0">
+                          <a:solidFill>
+                            <a:srgbClr val="0F172A"/>
+                          </a:solidFill>
+                        </a:rPr>
+                        <a:t>High recurring</a:t>
+                      </a:r>
+                    </a:p>
+                  </a:txBody>
+                  <a:tcPr>
+                    <a:solidFill>
+                      <a:srgbClr val="FFFFFF"/>
+                    </a:solidFill>
+                  </a:tcPr>
+                </a:tc>
+                <a:tc>
+                  <a:txBody>
+                    <a:bodyPr wrap="square" lIns="50000" rIns="50000" tIns="30000" bIns="30000"/>
+                    <a:lstStyle/>
+                    <a:p>
+                      <a:pPr algn="ctr">
+                        <a:buNone/>
+                      </a:pPr>
+                      <a:r>
+                        <a:rPr sz="1000" b="0">
+                          <a:solidFill>
+                            <a:srgbClr val="0F172A"/>
+                          </a:solidFill>
+                        </a:rPr>
+                        <a:t>Govt funded</a:t>
+                      </a:r>
+                    </a:p>
+                  </a:txBody>
+                  <a:tcPr>
+                    <a:solidFill>
+                      <a:srgbClr val="FFFFFF"/>
+                    </a:solidFill>
+                  </a:tcPr>
+                </a:tc>
+                <a:tc>
+                  <a:txBody>
+                    <a:bodyPr wrap="square" lIns="50000" rIns="50000" tIns="30000" bIns="30000"/>
+                    <a:lstStyle/>
+                    <a:p>
+                      <a:pPr algn="ctr">
+                        <a:buNone/>
+                      </a:pPr>
+                      <a:r>
+                        <a:rPr sz="1000" b="0">
+                          <a:solidFill>
+                            <a:srgbClr val="0F172A"/>
+                          </a:solidFill>
+                        </a:rPr>
+                        <a:t>₹5L–15L / site</a:t>
+                      </a:r>
+                    </a:p>
+                  </a:txBody>
+                  <a:tcPr>
+                    <a:solidFill>
+                      <a:srgbClr val="FFFFFF"/>
+                    </a:solidFill>
+                  </a:tcPr>
+                </a:tc>
+              </a:tr>
+            </a:tbl>
+          </a:graphicData>
+        </a:graphic>
+      </p:graphicFrame>
     </p:spTree>
     <p:extLst>
       <p:ext uri="{BB962C8B-B14F-4D97-AF65-F5344CB8AC3E}">
